--- a/01 Classes/Aula 11 RAD Python - Classes - Orientação a Objetos.pptx
+++ b/01 Classes/Aula 11 RAD Python - Classes - Orientação a Objetos.pptx
@@ -5,7 +5,7 @@
     <p:sldMasterId id="2147483671" r:id="rId1"/>
   </p:sldMasterIdLst>
   <p:notesMasterIdLst>
-    <p:notesMasterId r:id="rId39"/>
+    <p:notesMasterId r:id="rId40"/>
   </p:notesMasterIdLst>
   <p:sldIdLst>
     <p:sldId id="291" r:id="rId2"/>
@@ -40,11 +40,12 @@
     <p:sldId id="363" r:id="rId31"/>
     <p:sldId id="364" r:id="rId32"/>
     <p:sldId id="365" r:id="rId33"/>
-    <p:sldId id="323" r:id="rId34"/>
-    <p:sldId id="333" r:id="rId35"/>
-    <p:sldId id="334" r:id="rId36"/>
-    <p:sldId id="337" r:id="rId37"/>
-    <p:sldId id="309" r:id="rId38"/>
+    <p:sldId id="374" r:id="rId34"/>
+    <p:sldId id="323" r:id="rId35"/>
+    <p:sldId id="333" r:id="rId36"/>
+    <p:sldId id="334" r:id="rId37"/>
+    <p:sldId id="337" r:id="rId38"/>
+    <p:sldId id="309" r:id="rId39"/>
   </p:sldIdLst>
   <p:sldSz cx="9144000" cy="5143500" type="screen16x9"/>
   <p:notesSz cx="6858000" cy="9144000"/>
@@ -1926,7 +1927,13 @@
   <p:cSld>
     <p:spTree>
       <p:nvGrpSpPr>
-        <p:cNvPr id="1" name=""/>
+        <p:cNvPr id="1" name="">
+          <a:extLst>
+            <a:ext uri="{FF2B5EF4-FFF2-40B4-BE49-F238E27FC236}">
+              <a16:creationId xmlns:a16="http://schemas.microsoft.com/office/drawing/2014/main" id="{8E6BF704-A433-05CE-EE28-5C879B5E763E}"/>
+            </a:ext>
+          </a:extLst>
+        </p:cNvPr>
         <p:cNvGrpSpPr/>
         <p:nvPr/>
       </p:nvGrpSpPr>
@@ -1940,7 +1947,13 @@
       </p:grpSpPr>
       <p:sp>
         <p:nvSpPr>
-          <p:cNvPr id="2" name="Espaço Reservado para Imagem de Slide 1"/>
+          <p:cNvPr id="2" name="Espaço Reservado para Imagem de Slide 1">
+            <a:extLst>
+              <a:ext uri="{FF2B5EF4-FFF2-40B4-BE49-F238E27FC236}">
+                <a16:creationId xmlns:a16="http://schemas.microsoft.com/office/drawing/2014/main" id="{2DD8D6A1-44D5-B8BE-3BB2-4AA344C7390F}"/>
+              </a:ext>
+            </a:extLst>
+          </p:cNvPr>
           <p:cNvSpPr>
             <a:spLocks noGrp="1" noRot="1" noChangeAspect="1"/>
           </p:cNvSpPr>
@@ -1957,7 +1970,13 @@
       </p:sp>
       <p:sp>
         <p:nvSpPr>
-          <p:cNvPr id="3" name="Espaço Reservado para Anotações 2"/>
+          <p:cNvPr id="3" name="Espaço Reservado para Anotações 2">
+            <a:extLst>
+              <a:ext uri="{FF2B5EF4-FFF2-40B4-BE49-F238E27FC236}">
+                <a16:creationId xmlns:a16="http://schemas.microsoft.com/office/drawing/2014/main" id="{4A113186-96D0-7A4B-0028-2729324A383A}"/>
+              </a:ext>
+            </a:extLst>
+          </p:cNvPr>
           <p:cNvSpPr>
             <a:spLocks noGrp="1"/>
           </p:cNvSpPr>
@@ -1977,7 +1996,7 @@
     </p:spTree>
     <p:extLst>
       <p:ext uri="{BB962C8B-B14F-4D97-AF65-F5344CB8AC3E}">
-        <p14:creationId xmlns:p14="http://schemas.microsoft.com/office/powerpoint/2010/main" val="2709569597"/>
+        <p14:creationId xmlns:p14="http://schemas.microsoft.com/office/powerpoint/2010/main" val="2416353023"/>
       </p:ext>
     </p:extLst>
   </p:cSld>
@@ -2043,7 +2062,7 @@
     </p:spTree>
     <p:extLst>
       <p:ext uri="{BB962C8B-B14F-4D97-AF65-F5344CB8AC3E}">
-        <p14:creationId xmlns:p14="http://schemas.microsoft.com/office/powerpoint/2010/main" val="585304384"/>
+        <p14:creationId xmlns:p14="http://schemas.microsoft.com/office/powerpoint/2010/main" val="2709569597"/>
       </p:ext>
     </p:extLst>
   </p:cSld>
@@ -2109,6 +2128,72 @@
     </p:spTree>
     <p:extLst>
       <p:ext uri="{BB962C8B-B14F-4D97-AF65-F5344CB8AC3E}">
+        <p14:creationId xmlns:p14="http://schemas.microsoft.com/office/powerpoint/2010/main" val="585304384"/>
+      </p:ext>
+    </p:extLst>
+  </p:cSld>
+  <p:clrMapOvr>
+    <a:masterClrMapping/>
+  </p:clrMapOvr>
+</p:notes>
+</file>
+
+<file path=ppt/notesSlides/notesSlide34.xml><?xml version="1.0" encoding="utf-8"?>
+<p:notes xmlns:a="http://schemas.openxmlformats.org/drawingml/2006/main" xmlns:r="http://schemas.openxmlformats.org/officeDocument/2006/relationships" xmlns:p="http://schemas.openxmlformats.org/presentationml/2006/main">
+  <p:cSld>
+    <p:spTree>
+      <p:nvGrpSpPr>
+        <p:cNvPr id="1" name=""/>
+        <p:cNvGrpSpPr/>
+        <p:nvPr/>
+      </p:nvGrpSpPr>
+      <p:grpSpPr>
+        <a:xfrm>
+          <a:off x="0" y="0"/>
+          <a:ext cx="0" cy="0"/>
+          <a:chOff x="0" y="0"/>
+          <a:chExt cx="0" cy="0"/>
+        </a:xfrm>
+      </p:grpSpPr>
+      <p:sp>
+        <p:nvSpPr>
+          <p:cNvPr id="2" name="Espaço Reservado para Imagem de Slide 1"/>
+          <p:cNvSpPr>
+            <a:spLocks noGrp="1" noRot="1" noChangeAspect="1"/>
+          </p:cNvSpPr>
+          <p:nvPr>
+            <p:ph type="sldImg"/>
+          </p:nvPr>
+        </p:nvSpPr>
+        <p:spPr>
+          <a:xfrm>
+            <a:off x="381000" y="685800"/>
+            <a:ext cx="6096000" cy="3429000"/>
+          </a:xfrm>
+        </p:spPr>
+      </p:sp>
+      <p:sp>
+        <p:nvSpPr>
+          <p:cNvPr id="3" name="Espaço Reservado para Anotações 2"/>
+          <p:cNvSpPr>
+            <a:spLocks noGrp="1"/>
+          </p:cNvSpPr>
+          <p:nvPr>
+            <p:ph type="body" idx="1"/>
+          </p:nvPr>
+        </p:nvSpPr>
+        <p:spPr/>
+        <p:txBody>
+          <a:bodyPr/>
+          <a:lstStyle/>
+          <a:p>
+            <a:endParaRPr lang="pt-BR" dirty="0"/>
+          </a:p>
+        </p:txBody>
+      </p:sp>
+    </p:spTree>
+    <p:extLst>
+      <p:ext uri="{BB962C8B-B14F-4D97-AF65-F5344CB8AC3E}">
         <p14:creationId xmlns:p14="http://schemas.microsoft.com/office/powerpoint/2010/main" val="2296249050"/>
       </p:ext>
     </p:extLst>
@@ -2119,7 +2204,7 @@
 </p:notes>
 </file>
 
-<file path=ppt/notesSlides/notesSlide34.xml><?xml version="1.0" encoding="utf-8"?>
+<file path=ppt/notesSlides/notesSlide35.xml><?xml version="1.0" encoding="utf-8"?>
 <p:notes xmlns:a="http://schemas.openxmlformats.org/drawingml/2006/main" xmlns:r="http://schemas.openxmlformats.org/officeDocument/2006/relationships" xmlns:p="http://schemas.openxmlformats.org/presentationml/2006/main">
   <p:cSld>
     <p:spTree>
@@ -2720,7 +2805,7 @@
           <a:p>
             <a:fld id="{48A87A34-81AB-432B-8DAE-1953F412C126}" type="datetimeFigureOut">
               <a:rPr lang="en-US" smtClean="0"/>
-              <a:t>11/2/2023</a:t>
+              <a:t>4/7/2026</a:t>
             </a:fld>
             <a:endParaRPr lang="en-US" dirty="0"/>
           </a:p>
@@ -2931,7 +3016,7 @@
           <a:p>
             <a:fld id="{48A87A34-81AB-432B-8DAE-1953F412C126}" type="datetimeFigureOut">
               <a:rPr lang="en-US" smtClean="0"/>
-              <a:t>11/2/2023</a:t>
+              <a:t>4/7/2026</a:t>
             </a:fld>
             <a:endParaRPr lang="en-US" dirty="0"/>
           </a:p>
@@ -3146,7 +3231,7 @@
           <a:p>
             <a:fld id="{48A87A34-81AB-432B-8DAE-1953F412C126}" type="datetimeFigureOut">
               <a:rPr lang="en-US" smtClean="0"/>
-              <a:t>11/2/2023</a:t>
+              <a:t>4/7/2026</a:t>
             </a:fld>
             <a:endParaRPr lang="en-US" dirty="0"/>
           </a:p>
@@ -3514,7 +3599,7 @@
           <a:p>
             <a:fld id="{48A87A34-81AB-432B-8DAE-1953F412C126}" type="datetimeFigureOut">
               <a:rPr lang="en-US" smtClean="0"/>
-              <a:t>11/2/2023</a:t>
+              <a:t>4/7/2026</a:t>
             </a:fld>
             <a:endParaRPr lang="en-US" dirty="0"/>
           </a:p>
@@ -3793,7 +3878,7 @@
           <a:p>
             <a:fld id="{48A87A34-81AB-432B-8DAE-1953F412C126}" type="datetimeFigureOut">
               <a:rPr lang="en-US" smtClean="0"/>
-              <a:t>11/2/2023</a:t>
+              <a:t>4/7/2026</a:t>
             </a:fld>
             <a:endParaRPr lang="en-US" dirty="0"/>
           </a:p>
@@ -4061,7 +4146,7 @@
           <a:p>
             <a:fld id="{48A87A34-81AB-432B-8DAE-1953F412C126}" type="datetimeFigureOut">
               <a:rPr lang="en-US" smtClean="0"/>
-              <a:t>11/2/2023</a:t>
+              <a:t>4/7/2026</a:t>
             </a:fld>
             <a:endParaRPr lang="en-US" dirty="0"/>
           </a:p>
@@ -4477,7 +4562,7 @@
           <a:p>
             <a:fld id="{48A87A34-81AB-432B-8DAE-1953F412C126}" type="datetimeFigureOut">
               <a:rPr lang="en-US" smtClean="0"/>
-              <a:t>11/2/2023</a:t>
+              <a:t>4/7/2026</a:t>
             </a:fld>
             <a:endParaRPr lang="en-US" dirty="0"/>
           </a:p>
@@ -4626,7 +4711,7 @@
           <a:p>
             <a:fld id="{48A87A34-81AB-432B-8DAE-1953F412C126}" type="datetimeFigureOut">
               <a:rPr lang="en-US" smtClean="0"/>
-              <a:t>11/2/2023</a:t>
+              <a:t>4/7/2026</a:t>
             </a:fld>
             <a:endParaRPr lang="en-US" dirty="0"/>
           </a:p>
@@ -4752,7 +4837,7 @@
           <a:p>
             <a:fld id="{48A87A34-81AB-432B-8DAE-1953F412C126}" type="datetimeFigureOut">
               <a:rPr lang="en-US" smtClean="0"/>
-              <a:t>11/2/2023</a:t>
+              <a:t>4/7/2026</a:t>
             </a:fld>
             <a:endParaRPr lang="en-US" dirty="0"/>
           </a:p>
@@ -5003,7 +5088,7 @@
           <a:p>
             <a:fld id="{48A87A34-81AB-432B-8DAE-1953F412C126}" type="datetimeFigureOut">
               <a:rPr lang="en-US" smtClean="0"/>
-              <a:t>11/2/2023</a:t>
+              <a:t>4/7/2026</a:t>
             </a:fld>
             <a:endParaRPr lang="en-US" dirty="0"/>
           </a:p>
@@ -5449,7 +5534,7 @@
             <a:fld id="{48A87A34-81AB-432B-8DAE-1953F412C126}" type="datetimeFigureOut">
               <a:rPr lang="en-US" smtClean="0"/>
               <a:pPr/>
-              <a:t>11/2/2023</a:t>
+              <a:t>4/7/2026</a:t>
             </a:fld>
             <a:endParaRPr lang="en-US" dirty="0"/>
           </a:p>
@@ -5616,6 +5701,13 @@
             <a:schemeClr val="lt1"/>
           </a:fontRef>
         </p:style>
+        <p:txBody>
+          <a:bodyPr/>
+          <a:lstStyle/>
+          <a:p>
+            <a:endParaRPr lang="pt-BR"/>
+          </a:p>
+        </p:txBody>
       </p:sp>
       <p:pic>
         <p:nvPicPr>
@@ -5777,7 +5869,7 @@
             <a:fld id="{48A87A34-81AB-432B-8DAE-1953F412C126}" type="datetimeFigureOut">
               <a:rPr lang="en-US" smtClean="0"/>
               <a:pPr/>
-              <a:t>11/2/2023</a:t>
+              <a:t>4/7/2026</a:t>
             </a:fld>
             <a:endParaRPr lang="en-US" dirty="0"/>
           </a:p>
@@ -11495,6 +11587,16 @@
               <a:buNone/>
             </a:pPr>
             <a:r>
+              <a:rPr lang="pt-BR" sz="2000" b="1" dirty="0">
+                <a:solidFill>
+                  <a:schemeClr val="tx1"/>
+                </a:solidFill>
+                <a:latin typeface="Times New Roman" panose="02020603050405020304" pitchFamily="18" charset="0"/>
+                <a:cs typeface="Times New Roman" panose="02020603050405020304" pitchFamily="18" charset="0"/>
+              </a:rPr>
+              <a:t>	</a:t>
+            </a:r>
+            <a:r>
               <a:rPr lang="pt-BR" sz="2000" b="1" dirty="0" err="1">
                 <a:solidFill>
                   <a:schemeClr val="tx1"/>
@@ -11670,6 +11772,16 @@
             <a:pPr marL="619125" lvl="1" indent="0" algn="just">
               <a:buNone/>
             </a:pPr>
+            <a:r>
+              <a:rPr lang="pt-BR" sz="2000" b="1" dirty="0">
+                <a:solidFill>
+                  <a:schemeClr val="tx1"/>
+                </a:solidFill>
+                <a:latin typeface="Times New Roman" panose="02020603050405020304" pitchFamily="18" charset="0"/>
+                <a:cs typeface="Times New Roman" panose="02020603050405020304" pitchFamily="18" charset="0"/>
+              </a:rPr>
+              <a:t>	</a:t>
+            </a:r>
             <a:r>
               <a:rPr lang="pt-BR" sz="2000" b="1" dirty="0" err="1">
                 <a:solidFill>
@@ -12160,7 +12272,7 @@
               <a:t>"</a:t>
             </a:r>
             <a:r>
-              <a:rPr lang="pt-BR" sz="2000">
+              <a:rPr lang="pt-BR" sz="2000" dirty="0">
                 <a:solidFill>
                   <a:schemeClr val="tx1"/>
                 </a:solidFill>
@@ -12170,14 +12282,14 @@
               <a:t>Digital Influencer</a:t>
             </a:r>
             <a:r>
-              <a:rPr lang="pt-BR" sz="2000">
+              <a:rPr lang="pt-BR" sz="2000" dirty="0">
                 <a:latin typeface="Times New Roman" panose="02020603050405020304" pitchFamily="18" charset="0"/>
                 <a:cs typeface="Times New Roman" panose="02020603050405020304" pitchFamily="18" charset="0"/>
               </a:rPr>
               <a:t>"</a:t>
             </a:r>
             <a:r>
-              <a:rPr lang="pt-BR" sz="2000">
+              <a:rPr lang="pt-BR" sz="2000" dirty="0">
                 <a:solidFill>
                   <a:schemeClr val="tx1"/>
                 </a:solidFill>
@@ -12217,22 +12329,15 @@
               <a:t># </a:t>
             </a:r>
             <a:r>
-              <a:rPr lang="pt-BR" sz="2000" b="1" dirty="0" err="1">
+              <a:rPr lang="pt-BR" sz="2000" b="1" dirty="0">
                 <a:solidFill>
                   <a:srgbClr val="FF0000"/>
                 </a:solidFill>
                 <a:latin typeface="Times New Roman" panose="02020603050405020304" pitchFamily="18" charset="0"/>
                 <a:cs typeface="Times New Roman" panose="02020603050405020304" pitchFamily="18" charset="0"/>
               </a:rPr>
-              <a:t>hereança</a:t>
-            </a:r>
-            <a:endParaRPr lang="pt-BR" sz="2000" b="1" dirty="0">
-              <a:solidFill>
-                <a:srgbClr val="FF0000"/>
-              </a:solidFill>
-              <a:latin typeface="Times New Roman" panose="02020603050405020304" pitchFamily="18" charset="0"/>
-              <a:cs typeface="Times New Roman" panose="02020603050405020304" pitchFamily="18" charset="0"/>
-            </a:endParaRPr>
+              <a:t>instância</a:t>
+            </a:r>
           </a:p>
           <a:p>
             <a:pPr marL="0" indent="0" algn="just">
@@ -14102,7 +14207,7 @@
                 <a:latin typeface="Times New Roman" panose="02020603050405020304" pitchFamily="18" charset="0"/>
                 <a:cs typeface="Times New Roman" panose="02020603050405020304" pitchFamily="18" charset="0"/>
               </a:rPr>
-              <a:t>print(resultado3)  # Saída: 1</a:t>
+              <a:t>print(resultado3)  # Saída: 15</a:t>
             </a:r>
           </a:p>
         </p:txBody>
@@ -14776,7 +14881,7 @@
                 <a:latin typeface="Times New Roman" panose="02020603050405020304" pitchFamily="18" charset="0"/>
                 <a:cs typeface="Times New Roman" panose="02020603050405020304" pitchFamily="18" charset="0"/>
               </a:rPr>
-              <a:t>fazer_o_animal_falar</a:t>
+              <a:t>fazerAnimalFalar</a:t>
             </a:r>
             <a:r>
               <a:rPr lang="pt-BR" sz="2000" dirty="0">
@@ -14954,7 +15059,7 @@
         <p:spPr>
           <a:xfrm>
             <a:off x="4064000" y="1225887"/>
-            <a:ext cx="4937135" cy="2031325"/>
+            <a:ext cx="4937135" cy="1477328"/>
           </a:xfrm>
           <a:prstGeom prst="rect">
             <a:avLst/>
@@ -14996,7 +15101,7 @@
                 <a:latin typeface="Times New Roman" panose="02020603050405020304" pitchFamily="18" charset="0"/>
                 <a:cs typeface="Times New Roman" panose="02020603050405020304" pitchFamily="18" charset="0"/>
               </a:rPr>
-              <a:t>fazer_o_animal_falar</a:t>
+              <a:t>fazerAnimalFalar</a:t>
             </a:r>
             <a:r>
               <a:rPr lang="pt-BR" sz="1800" dirty="0">
@@ -15024,71 +15129,76 @@
             <a:pPr marL="0" indent="0" algn="just">
               <a:buNone/>
             </a:pPr>
+            <a:r>
+              <a:rPr lang="pt-BR" sz="1800" b="1" dirty="0" err="1">
+                <a:latin typeface="Times New Roman" panose="02020603050405020304" pitchFamily="18" charset="0"/>
+                <a:cs typeface="Times New Roman" panose="02020603050405020304" pitchFamily="18" charset="0"/>
+              </a:rPr>
+              <a:t>fazerAnimalFalar</a:t>
+            </a:r>
+            <a:r>
+              <a:rPr lang="pt-BR" sz="1800" dirty="0">
+                <a:latin typeface="Times New Roman" panose="02020603050405020304" pitchFamily="18" charset="0"/>
+                <a:cs typeface="Times New Roman" panose="02020603050405020304" pitchFamily="18" charset="0"/>
+              </a:rPr>
+              <a:t>(gato)         # Saída: </a:t>
+            </a:r>
+            <a:r>
+              <a:rPr lang="pt-BR" sz="1800" dirty="0" err="1">
+                <a:latin typeface="Times New Roman" panose="02020603050405020304" pitchFamily="18" charset="0"/>
+                <a:cs typeface="Times New Roman" panose="02020603050405020304" pitchFamily="18" charset="0"/>
+              </a:rPr>
+              <a:t>Meow</a:t>
+            </a:r>
+            <a:r>
+              <a:rPr lang="pt-BR" sz="1800" dirty="0">
+                <a:latin typeface="Times New Roman" panose="02020603050405020304" pitchFamily="18" charset="0"/>
+                <a:cs typeface="Times New Roman" panose="02020603050405020304" pitchFamily="18" charset="0"/>
+              </a:rPr>
+              <a:t>!</a:t>
+            </a:r>
+          </a:p>
+          <a:p>
+            <a:pPr algn="just"/>
+            <a:r>
+              <a:rPr lang="pt-BR" sz="1800" b="1" dirty="0" err="1">
+                <a:latin typeface="Times New Roman" panose="02020603050405020304" pitchFamily="18" charset="0"/>
+                <a:cs typeface="Times New Roman" panose="02020603050405020304" pitchFamily="18" charset="0"/>
+              </a:rPr>
+              <a:t>fazerAnimalFalar</a:t>
+            </a:r>
+            <a:r>
+              <a:rPr lang="pt-BR" sz="1800" dirty="0">
+                <a:latin typeface="Times New Roman" panose="02020603050405020304" pitchFamily="18" charset="0"/>
+                <a:cs typeface="Times New Roman" panose="02020603050405020304" pitchFamily="18" charset="0"/>
+              </a:rPr>
+              <a:t>(pato) </a:t>
+            </a:r>
+            <a:r>
+              <a:rPr lang="pt-BR" dirty="0">
+                <a:latin typeface="Times New Roman" panose="02020603050405020304" pitchFamily="18" charset="0"/>
+                <a:cs typeface="Times New Roman" panose="02020603050405020304" pitchFamily="18" charset="0"/>
+              </a:rPr>
+              <a:t>	 # Saída: </a:t>
+            </a:r>
+            <a:r>
+              <a:rPr lang="pt-BR" dirty="0" err="1">
+                <a:latin typeface="Times New Roman" panose="02020603050405020304" pitchFamily="18" charset="0"/>
+                <a:cs typeface="Times New Roman" panose="02020603050405020304" pitchFamily="18" charset="0"/>
+              </a:rPr>
+              <a:t>Quack</a:t>
+            </a:r>
+            <a:r>
+              <a:rPr lang="pt-BR" dirty="0">
+                <a:latin typeface="Times New Roman" panose="02020603050405020304" pitchFamily="18" charset="0"/>
+                <a:cs typeface="Times New Roman" panose="02020603050405020304" pitchFamily="18" charset="0"/>
+              </a:rPr>
+              <a:t>!</a:t>
+            </a:r>
             <a:endParaRPr lang="pt-BR" sz="1800" dirty="0">
               <a:latin typeface="Times New Roman" panose="02020603050405020304" pitchFamily="18" charset="0"/>
               <a:cs typeface="Times New Roman" panose="02020603050405020304" pitchFamily="18" charset="0"/>
             </a:endParaRPr>
-          </a:p>
-          <a:p>
-            <a:pPr marL="0" indent="0" algn="just">
-              <a:buNone/>
-            </a:pPr>
-            <a:r>
-              <a:rPr lang="pt-BR" sz="1800" b="1" dirty="0" err="1">
-                <a:latin typeface="Times New Roman" panose="02020603050405020304" pitchFamily="18" charset="0"/>
-                <a:cs typeface="Times New Roman" panose="02020603050405020304" pitchFamily="18" charset="0"/>
-              </a:rPr>
-              <a:t>fazer_o_animal_falar</a:t>
-            </a:r>
-            <a:r>
-              <a:rPr lang="pt-BR" sz="1800" dirty="0">
-                <a:latin typeface="Times New Roman" panose="02020603050405020304" pitchFamily="18" charset="0"/>
-                <a:cs typeface="Times New Roman" panose="02020603050405020304" pitchFamily="18" charset="0"/>
-              </a:rPr>
-              <a:t>(gato)      # Saída: </a:t>
-            </a:r>
-            <a:r>
-              <a:rPr lang="pt-BR" sz="1800" dirty="0" err="1">
-                <a:latin typeface="Times New Roman" panose="02020603050405020304" pitchFamily="18" charset="0"/>
-                <a:cs typeface="Times New Roman" panose="02020603050405020304" pitchFamily="18" charset="0"/>
-              </a:rPr>
-              <a:t>Meow</a:t>
-            </a:r>
-            <a:r>
-              <a:rPr lang="pt-BR" sz="1800" dirty="0">
-                <a:latin typeface="Times New Roman" panose="02020603050405020304" pitchFamily="18" charset="0"/>
-                <a:cs typeface="Times New Roman" panose="02020603050405020304" pitchFamily="18" charset="0"/>
-              </a:rPr>
-              <a:t>!</a:t>
-            </a:r>
-          </a:p>
-          <a:p>
-            <a:pPr marL="0" indent="0" algn="just">
-              <a:buNone/>
-            </a:pPr>
-            <a:endParaRPr lang="pt-BR" sz="1800" dirty="0">
-              <a:latin typeface="Times New Roman" panose="02020603050405020304" pitchFamily="18" charset="0"/>
-              <a:cs typeface="Times New Roman" panose="02020603050405020304" pitchFamily="18" charset="0"/>
-            </a:endParaRPr>
-          </a:p>
-          <a:p>
-            <a:pPr marL="0" indent="0" algn="just">
-              <a:buNone/>
-            </a:pPr>
-            <a:r>
-              <a:rPr lang="pt-BR" sz="1800" b="1" dirty="0" err="1">
-                <a:latin typeface="Times New Roman" panose="02020603050405020304" pitchFamily="18" charset="0"/>
-                <a:cs typeface="Times New Roman" panose="02020603050405020304" pitchFamily="18" charset="0"/>
-              </a:rPr>
-              <a:t>fazer_o_animal_falar</a:t>
-            </a:r>
-            <a:r>
-              <a:rPr lang="pt-BR" sz="1800" dirty="0">
-                <a:latin typeface="Times New Roman" panose="02020603050405020304" pitchFamily="18" charset="0"/>
-                <a:cs typeface="Times New Roman" panose="02020603050405020304" pitchFamily="18" charset="0"/>
-              </a:rPr>
-              <a:t>(pato) </a:t>
-            </a:r>
           </a:p>
         </p:txBody>
       </p:sp>
@@ -16192,7 +16302,7 @@
               <a:buNone/>
             </a:pPr>
             <a:r>
-              <a:rPr lang="en-US" sz="1600" b="1" dirty="0">
+              <a:rPr lang="en-US" sz="2400" b="1" dirty="0">
                 <a:highlight>
                   <a:srgbClr val="FFFF00"/>
                 </a:highlight>
@@ -16202,7 +16312,7 @@
               <a:t>class</a:t>
             </a:r>
             <a:r>
-              <a:rPr lang="en-US" sz="1600" dirty="0">
+              <a:rPr lang="en-US" sz="2400" dirty="0">
                 <a:highlight>
                   <a:srgbClr val="FFFF00"/>
                 </a:highlight>
@@ -16212,7 +16322,7 @@
               <a:t> </a:t>
             </a:r>
             <a:r>
-              <a:rPr lang="en-US" sz="1600" b="1">
+              <a:rPr lang="en-US" sz="2400" b="1" dirty="0">
                 <a:solidFill>
                   <a:srgbClr val="FF0000"/>
                 </a:solidFill>
@@ -16225,7 +16335,7 @@
               <a:t>Super</a:t>
             </a:r>
             <a:r>
-              <a:rPr lang="en-US" sz="1600">
+              <a:rPr lang="en-US" sz="2400" dirty="0">
                 <a:highlight>
                   <a:srgbClr val="FFFF00"/>
                 </a:highlight>
@@ -16235,7 +16345,7 @@
               <a:t>: </a:t>
             </a:r>
             <a:r>
-              <a:rPr lang="en-US" sz="1600" b="1">
+              <a:rPr lang="en-US" sz="2400" b="1" dirty="0">
                 <a:solidFill>
                   <a:srgbClr val="FF0000"/>
                 </a:solidFill>
@@ -16247,7 +16357,7 @@
               </a:rPr>
               <a:t>POLIMORFISMO DINÂMICO - OVERRIDE</a:t>
             </a:r>
-            <a:endParaRPr lang="en-US" sz="1600" dirty="0">
+            <a:endParaRPr lang="en-US" sz="2400" dirty="0">
               <a:highlight>
                 <a:srgbClr val="FFFF00"/>
               </a:highlight>
@@ -16260,7 +16370,7 @@
               <a:buNone/>
             </a:pPr>
             <a:r>
-              <a:rPr lang="en-US" sz="1600" b="1" dirty="0">
+              <a:rPr lang="en-US" sz="2400" b="1" dirty="0">
                 <a:highlight>
                   <a:srgbClr val="FFFF00"/>
                 </a:highlight>
@@ -16270,7 +16380,7 @@
               <a:t> def</a:t>
             </a:r>
             <a:r>
-              <a:rPr lang="en-US" sz="1600" dirty="0">
+              <a:rPr lang="en-US" sz="2400" dirty="0">
                 <a:highlight>
                   <a:srgbClr val="FFFF00"/>
                 </a:highlight>
@@ -16280,7 +16390,7 @@
               <a:t> hello(</a:t>
             </a:r>
             <a:r>
-              <a:rPr lang="en-US" sz="1600" b="1" dirty="0">
+              <a:rPr lang="en-US" sz="2400" b="1" dirty="0">
                 <a:highlight>
                   <a:srgbClr val="FFFF00"/>
                 </a:highlight>
@@ -16290,7 +16400,7 @@
               <a:t>self</a:t>
             </a:r>
             <a:r>
-              <a:rPr lang="en-US" sz="1600" dirty="0">
+              <a:rPr lang="en-US" sz="2400" dirty="0">
                 <a:highlight>
                   <a:srgbClr val="FFFF00"/>
                 </a:highlight>
@@ -16305,7 +16415,7 @@
               <a:buNone/>
             </a:pPr>
             <a:r>
-              <a:rPr lang="en-US" sz="1600" dirty="0">
+              <a:rPr lang="en-US" sz="2400" dirty="0">
                 <a:highlight>
                   <a:srgbClr val="FFFF00"/>
                 </a:highlight>
@@ -16315,7 +16425,7 @@
               <a:t>    </a:t>
             </a:r>
             <a:r>
-              <a:rPr lang="en-US" sz="1600" b="1" dirty="0">
+              <a:rPr lang="en-US" sz="2400" b="1" dirty="0">
                 <a:highlight>
                   <a:srgbClr val="FFFF00"/>
                 </a:highlight>
@@ -16325,53 +16435,33 @@
               <a:t>print</a:t>
             </a:r>
             <a:r>
-              <a:rPr lang="en-US" sz="1600" dirty="0">
+              <a:rPr lang="en-US" sz="2400" dirty="0">
                 <a:highlight>
                   <a:srgbClr val="FFFF00"/>
                 </a:highlight>
                 <a:latin typeface="Times New Roman" panose="02020603050405020304" pitchFamily="18" charset="0"/>
                 <a:cs typeface="Times New Roman" panose="02020603050405020304" pitchFamily="18" charset="0"/>
               </a:rPr>
-              <a:t>("</a:t>
-            </a:r>
-            <a:r>
-              <a:rPr lang="en-US" sz="1600" dirty="0" err="1">
+              <a:t>("Olá, sou a </a:t>
+            </a:r>
+            <a:r>
+              <a:rPr lang="en-US" sz="2400" dirty="0" err="1">
                 <a:highlight>
                   <a:srgbClr val="FFFF00"/>
                 </a:highlight>
                 <a:latin typeface="Times New Roman" panose="02020603050405020304" pitchFamily="18" charset="0"/>
                 <a:cs typeface="Times New Roman" panose="02020603050405020304" pitchFamily="18" charset="0"/>
               </a:rPr>
-              <a:t>Olá</a:t>
-            </a:r>
-            <a:r>
-              <a:rPr lang="en-US" sz="1600" dirty="0">
+              <a:t>superclasse</a:t>
+            </a:r>
+            <a:r>
+              <a:rPr lang="en-US" sz="2400" dirty="0">
                 <a:highlight>
                   <a:srgbClr val="FFFF00"/>
                 </a:highlight>
                 <a:latin typeface="Times New Roman" panose="02020603050405020304" pitchFamily="18" charset="0"/>
                 <a:cs typeface="Times New Roman" panose="02020603050405020304" pitchFamily="18" charset="0"/>
               </a:rPr>
-              <a:t>, sou a </a:t>
-            </a:r>
-            <a:r>
-              <a:rPr lang="en-US" sz="1600" dirty="0" err="1">
-                <a:highlight>
-                  <a:srgbClr val="FFFF00"/>
-                </a:highlight>
-                <a:latin typeface="Times New Roman" panose="02020603050405020304" pitchFamily="18" charset="0"/>
-                <a:cs typeface="Times New Roman" panose="02020603050405020304" pitchFamily="18" charset="0"/>
-              </a:rPr>
-              <a:t>superclasse</a:t>
-            </a:r>
-            <a:r>
-              <a:rPr lang="en-US" sz="1600" dirty="0">
-                <a:highlight>
-                  <a:srgbClr val="FFFF00"/>
-                </a:highlight>
-                <a:latin typeface="Times New Roman" panose="02020603050405020304" pitchFamily="18" charset="0"/>
-                <a:cs typeface="Times New Roman" panose="02020603050405020304" pitchFamily="18" charset="0"/>
-              </a:rPr>
               <a:t>!")</a:t>
             </a:r>
           </a:p>
@@ -16379,8 +16469,20 @@
             <a:pPr marL="0" indent="0" algn="just">
               <a:buNone/>
             </a:pPr>
-            <a:r>
-              <a:rPr lang="en-US" sz="1600" b="1" dirty="0">
+            <a:endParaRPr lang="en-US" sz="2400" dirty="0">
+              <a:highlight>
+                <a:srgbClr val="FFFF00"/>
+              </a:highlight>
+              <a:latin typeface="Times New Roman" panose="02020603050405020304" pitchFamily="18" charset="0"/>
+              <a:cs typeface="Times New Roman" panose="02020603050405020304" pitchFamily="18" charset="0"/>
+            </a:endParaRPr>
+          </a:p>
+          <a:p>
+            <a:pPr marL="0" indent="0" algn="just">
+              <a:buNone/>
+            </a:pPr>
+            <a:r>
+              <a:rPr lang="en-US" sz="2400" b="1" dirty="0">
                 <a:highlight>
                   <a:srgbClr val="00FF00"/>
                 </a:highlight>
@@ -16390,7 +16492,7 @@
               <a:t>class</a:t>
             </a:r>
             <a:r>
-              <a:rPr lang="en-US" sz="1600" dirty="0">
+              <a:rPr lang="en-US" sz="2400" dirty="0">
                 <a:highlight>
                   <a:srgbClr val="00FF00"/>
                 </a:highlight>
@@ -16400,7 +16502,7 @@
               <a:t> </a:t>
             </a:r>
             <a:r>
-              <a:rPr lang="en-US" sz="1600" b="1" dirty="0">
+              <a:rPr lang="en-US" sz="2400" b="1" dirty="0">
                 <a:highlight>
                   <a:srgbClr val="00FF00"/>
                 </a:highlight>
@@ -16410,7 +16512,7 @@
               <a:t>Sub</a:t>
             </a:r>
             <a:r>
-              <a:rPr lang="en-US" sz="1600" dirty="0">
+              <a:rPr lang="en-US" sz="2400" dirty="0">
                 <a:highlight>
                   <a:srgbClr val="00FF00"/>
                 </a:highlight>
@@ -16420,7 +16522,7 @@
               <a:t> (</a:t>
             </a:r>
             <a:r>
-              <a:rPr lang="en-US" sz="1600" b="1" dirty="0">
+              <a:rPr lang="en-US" sz="2400" b="1" dirty="0">
                 <a:solidFill>
                   <a:srgbClr val="FF0000"/>
                 </a:solidFill>
@@ -16433,7 +16535,7 @@
               <a:t>Super</a:t>
             </a:r>
             <a:r>
-              <a:rPr lang="en-US" sz="1600" dirty="0">
+              <a:rPr lang="en-US" sz="2400" dirty="0">
                 <a:highlight>
                   <a:srgbClr val="00FF00"/>
                 </a:highlight>
@@ -16448,7 +16550,7 @@
               <a:buNone/>
             </a:pPr>
             <a:r>
-              <a:rPr lang="en-US" sz="1600" b="1" dirty="0">
+              <a:rPr lang="en-US" sz="2400" b="1" dirty="0">
                 <a:highlight>
                   <a:srgbClr val="00FF00"/>
                 </a:highlight>
@@ -16458,7 +16560,7 @@
               <a:t>  def</a:t>
             </a:r>
             <a:r>
-              <a:rPr lang="en-US" sz="1600" dirty="0">
+              <a:rPr lang="en-US" sz="2400" dirty="0">
                 <a:highlight>
                   <a:srgbClr val="00FF00"/>
                 </a:highlight>
@@ -16473,7 +16575,7 @@
               <a:buNone/>
             </a:pPr>
             <a:r>
-              <a:rPr lang="en-US" sz="1600" b="1" dirty="0">
+              <a:rPr lang="en-US" sz="2400" b="1" dirty="0">
                 <a:highlight>
                   <a:srgbClr val="00FF00"/>
                 </a:highlight>
@@ -16483,299 +16585,35 @@
               <a:t>     print</a:t>
             </a:r>
             <a:r>
-              <a:rPr lang="en-US" sz="1600" dirty="0">
+              <a:rPr lang="en-US" sz="2400" dirty="0">
                 <a:highlight>
                   <a:srgbClr val="00FF00"/>
                 </a:highlight>
                 <a:latin typeface="Times New Roman" panose="02020603050405020304" pitchFamily="18" charset="0"/>
                 <a:cs typeface="Times New Roman" panose="02020603050405020304" pitchFamily="18" charset="0"/>
               </a:rPr>
-              <a:t>("</a:t>
-            </a:r>
-            <a:r>
-              <a:rPr lang="en-US" sz="1600" dirty="0" err="1">
+              <a:t>("Olá, sou a </a:t>
+            </a:r>
+            <a:r>
+              <a:rPr lang="en-US" sz="2400" dirty="0" err="1">
                 <a:highlight>
                   <a:srgbClr val="00FF00"/>
                 </a:highlight>
                 <a:latin typeface="Times New Roman" panose="02020603050405020304" pitchFamily="18" charset="0"/>
                 <a:cs typeface="Times New Roman" panose="02020603050405020304" pitchFamily="18" charset="0"/>
               </a:rPr>
-              <a:t>Olá</a:t>
-            </a:r>
-            <a:r>
-              <a:rPr lang="en-US" sz="1600" dirty="0">
+              <a:t>subclasse</a:t>
+            </a:r>
+            <a:r>
+              <a:rPr lang="en-US" sz="2400" dirty="0">
                 <a:highlight>
                   <a:srgbClr val="00FF00"/>
                 </a:highlight>
                 <a:latin typeface="Times New Roman" panose="02020603050405020304" pitchFamily="18" charset="0"/>
                 <a:cs typeface="Times New Roman" panose="02020603050405020304" pitchFamily="18" charset="0"/>
               </a:rPr>
-              <a:t>, sou a </a:t>
-            </a:r>
-            <a:r>
-              <a:rPr lang="en-US" sz="1600" dirty="0" err="1">
-                <a:highlight>
-                  <a:srgbClr val="00FF00"/>
-                </a:highlight>
-                <a:latin typeface="Times New Roman" panose="02020603050405020304" pitchFamily="18" charset="0"/>
-                <a:cs typeface="Times New Roman" panose="02020603050405020304" pitchFamily="18" charset="0"/>
-              </a:rPr>
-              <a:t>subclasse</a:t>
-            </a:r>
-            <a:r>
-              <a:rPr lang="en-US" sz="1600" dirty="0">
-                <a:highlight>
-                  <a:srgbClr val="00FF00"/>
-                </a:highlight>
-                <a:latin typeface="Times New Roman" panose="02020603050405020304" pitchFamily="18" charset="0"/>
-                <a:cs typeface="Times New Roman" panose="02020603050405020304" pitchFamily="18" charset="0"/>
-              </a:rPr>
               <a:t>!")</a:t>
             </a:r>
-          </a:p>
-          <a:p>
-            <a:pPr marL="0" indent="0" algn="just">
-              <a:buNone/>
-            </a:pPr>
-            <a:r>
-              <a:rPr lang="en-US" sz="1600" b="1" dirty="0">
-                <a:highlight>
-                  <a:srgbClr val="00FFFF"/>
-                </a:highlight>
-                <a:latin typeface="Times New Roman" panose="02020603050405020304" pitchFamily="18" charset="0"/>
-                <a:cs typeface="Times New Roman" panose="02020603050405020304" pitchFamily="18" charset="0"/>
-              </a:rPr>
-              <a:t>class</a:t>
-            </a:r>
-            <a:r>
-              <a:rPr lang="en-US" sz="1600" dirty="0">
-                <a:highlight>
-                  <a:srgbClr val="00FFFF"/>
-                </a:highlight>
-                <a:latin typeface="Times New Roman" panose="02020603050405020304" pitchFamily="18" charset="0"/>
-                <a:cs typeface="Times New Roman" panose="02020603050405020304" pitchFamily="18" charset="0"/>
-              </a:rPr>
-              <a:t> </a:t>
-            </a:r>
-            <a:r>
-              <a:rPr lang="en-US" sz="1600" b="1" dirty="0" err="1">
-                <a:solidFill>
-                  <a:srgbClr val="FF0000"/>
-                </a:solidFill>
-                <a:highlight>
-                  <a:srgbClr val="00FFFF"/>
-                </a:highlight>
-                <a:latin typeface="Times New Roman" panose="02020603050405020304" pitchFamily="18" charset="0"/>
-                <a:cs typeface="Times New Roman" panose="02020603050405020304" pitchFamily="18" charset="0"/>
-              </a:rPr>
-              <a:t>Subsub</a:t>
-            </a:r>
-            <a:r>
-              <a:rPr lang="en-US" sz="1600" dirty="0">
-                <a:highlight>
-                  <a:srgbClr val="00FFFF"/>
-                </a:highlight>
-                <a:latin typeface="Times New Roman" panose="02020603050405020304" pitchFamily="18" charset="0"/>
-                <a:cs typeface="Times New Roman" panose="02020603050405020304" pitchFamily="18" charset="0"/>
-              </a:rPr>
-              <a:t> (</a:t>
-            </a:r>
-            <a:r>
-              <a:rPr lang="en-US" sz="1600" b="1" dirty="0">
-                <a:highlight>
-                  <a:srgbClr val="00FFFF"/>
-                </a:highlight>
-                <a:latin typeface="Times New Roman" panose="02020603050405020304" pitchFamily="18" charset="0"/>
-                <a:cs typeface="Times New Roman" panose="02020603050405020304" pitchFamily="18" charset="0"/>
-              </a:rPr>
-              <a:t>Sub</a:t>
-            </a:r>
-            <a:r>
-              <a:rPr lang="en-US" sz="1600" dirty="0">
-                <a:highlight>
-                  <a:srgbClr val="00FFFF"/>
-                </a:highlight>
-                <a:latin typeface="Times New Roman" panose="02020603050405020304" pitchFamily="18" charset="0"/>
-                <a:cs typeface="Times New Roman" panose="02020603050405020304" pitchFamily="18" charset="0"/>
-              </a:rPr>
-              <a:t>):</a:t>
-            </a:r>
-          </a:p>
-          <a:p>
-            <a:pPr marL="0" indent="0" algn="just">
-              <a:buNone/>
-            </a:pPr>
-            <a:r>
-              <a:rPr lang="en-US" sz="1600" dirty="0">
-                <a:highlight>
-                  <a:srgbClr val="00FFFF"/>
-                </a:highlight>
-                <a:latin typeface="Times New Roman" panose="02020603050405020304" pitchFamily="18" charset="0"/>
-                <a:cs typeface="Times New Roman" panose="02020603050405020304" pitchFamily="18" charset="0"/>
-              </a:rPr>
-              <a:t>   </a:t>
-            </a:r>
-            <a:r>
-              <a:rPr lang="en-US" sz="1600" b="1" dirty="0">
-                <a:highlight>
-                  <a:srgbClr val="00FFFF"/>
-                </a:highlight>
-                <a:latin typeface="Times New Roman" panose="02020603050405020304" pitchFamily="18" charset="0"/>
-                <a:cs typeface="Times New Roman" panose="02020603050405020304" pitchFamily="18" charset="0"/>
-              </a:rPr>
-              <a:t>def</a:t>
-            </a:r>
-            <a:r>
-              <a:rPr lang="en-US" sz="1600" dirty="0">
-                <a:highlight>
-                  <a:srgbClr val="00FFFF"/>
-                </a:highlight>
-                <a:latin typeface="Times New Roman" panose="02020603050405020304" pitchFamily="18" charset="0"/>
-                <a:cs typeface="Times New Roman" panose="02020603050405020304" pitchFamily="18" charset="0"/>
-              </a:rPr>
-              <a:t> hello(self):</a:t>
-            </a:r>
-          </a:p>
-          <a:p>
-            <a:pPr marL="0" indent="0" algn="just">
-              <a:buNone/>
-            </a:pPr>
-            <a:r>
-              <a:rPr lang="en-US" sz="1600" b="1" dirty="0">
-                <a:highlight>
-                  <a:srgbClr val="00FFFF"/>
-                </a:highlight>
-                <a:latin typeface="Times New Roman" panose="02020603050405020304" pitchFamily="18" charset="0"/>
-                <a:cs typeface="Times New Roman" panose="02020603050405020304" pitchFamily="18" charset="0"/>
-              </a:rPr>
-              <a:t>       print</a:t>
-            </a:r>
-            <a:r>
-              <a:rPr lang="en-US" sz="1600" dirty="0">
-                <a:highlight>
-                  <a:srgbClr val="00FFFF"/>
-                </a:highlight>
-                <a:latin typeface="Times New Roman" panose="02020603050405020304" pitchFamily="18" charset="0"/>
-                <a:cs typeface="Times New Roman" panose="02020603050405020304" pitchFamily="18" charset="0"/>
-              </a:rPr>
-              <a:t>("</a:t>
-            </a:r>
-            <a:r>
-              <a:rPr lang="en-US" sz="1600" dirty="0" err="1">
-                <a:highlight>
-                  <a:srgbClr val="00FFFF"/>
-                </a:highlight>
-                <a:latin typeface="Times New Roman" panose="02020603050405020304" pitchFamily="18" charset="0"/>
-                <a:cs typeface="Times New Roman" panose="02020603050405020304" pitchFamily="18" charset="0"/>
-              </a:rPr>
-              <a:t>Olá</a:t>
-            </a:r>
-            <a:r>
-              <a:rPr lang="en-US" sz="1600" dirty="0">
-                <a:highlight>
-                  <a:srgbClr val="00FFFF"/>
-                </a:highlight>
-                <a:latin typeface="Times New Roman" panose="02020603050405020304" pitchFamily="18" charset="0"/>
-                <a:cs typeface="Times New Roman" panose="02020603050405020304" pitchFamily="18" charset="0"/>
-              </a:rPr>
-              <a:t>, sou a </a:t>
-            </a:r>
-            <a:r>
-              <a:rPr lang="en-US" sz="1600" dirty="0" err="1">
-                <a:highlight>
-                  <a:srgbClr val="00FFFF"/>
-                </a:highlight>
-                <a:latin typeface="Times New Roman" panose="02020603050405020304" pitchFamily="18" charset="0"/>
-                <a:cs typeface="Times New Roman" panose="02020603050405020304" pitchFamily="18" charset="0"/>
-              </a:rPr>
-              <a:t>subsubclasse</a:t>
-            </a:r>
-            <a:r>
-              <a:rPr lang="en-US" sz="1600" dirty="0">
-                <a:highlight>
-                  <a:srgbClr val="00FFFF"/>
-                </a:highlight>
-                <a:latin typeface="Times New Roman" panose="02020603050405020304" pitchFamily="18" charset="0"/>
-                <a:cs typeface="Times New Roman" panose="02020603050405020304" pitchFamily="18" charset="0"/>
-              </a:rPr>
-              <a:t>!")</a:t>
-            </a:r>
-          </a:p>
-          <a:p>
-            <a:pPr marL="0" indent="0" algn="just">
-              <a:buNone/>
-            </a:pPr>
-            <a:r>
-              <a:rPr lang="en-US" sz="1600" b="1" dirty="0">
-                <a:latin typeface="Times New Roman" panose="02020603050405020304" pitchFamily="18" charset="0"/>
-                <a:cs typeface="Times New Roman" panose="02020603050405020304" pitchFamily="18" charset="0"/>
-              </a:rPr>
-              <a:t>teste</a:t>
-            </a:r>
-            <a:r>
-              <a:rPr lang="en-US" sz="1600" dirty="0">
-                <a:latin typeface="Times New Roman" panose="02020603050405020304" pitchFamily="18" charset="0"/>
-                <a:cs typeface="Times New Roman" panose="02020603050405020304" pitchFamily="18" charset="0"/>
-              </a:rPr>
-              <a:t> = </a:t>
-            </a:r>
-            <a:r>
-              <a:rPr lang="en-US" sz="1600" b="1" dirty="0" err="1">
-                <a:highlight>
-                  <a:srgbClr val="00FFFF"/>
-                </a:highlight>
-                <a:latin typeface="Times New Roman" panose="02020603050405020304" pitchFamily="18" charset="0"/>
-                <a:cs typeface="Times New Roman" panose="02020603050405020304" pitchFamily="18" charset="0"/>
-              </a:rPr>
-              <a:t>Subsub</a:t>
-            </a:r>
-            <a:r>
-              <a:rPr lang="en-US" sz="1600" dirty="0">
-                <a:latin typeface="Times New Roman" panose="02020603050405020304" pitchFamily="18" charset="0"/>
-                <a:cs typeface="Times New Roman" panose="02020603050405020304" pitchFamily="18" charset="0"/>
-              </a:rPr>
-              <a:t>()</a:t>
-            </a:r>
-          </a:p>
-          <a:p>
-            <a:pPr marL="0" indent="0" algn="just">
-              <a:buNone/>
-            </a:pPr>
-            <a:r>
-              <a:rPr lang="en-US" sz="1600" b="1" dirty="0" err="1">
-                <a:latin typeface="Times New Roman" panose="02020603050405020304" pitchFamily="18" charset="0"/>
-                <a:cs typeface="Times New Roman" panose="02020603050405020304" pitchFamily="18" charset="0"/>
-              </a:rPr>
-              <a:t>teste</a:t>
-            </a:r>
-            <a:r>
-              <a:rPr lang="en-US" sz="1600" dirty="0" err="1">
-                <a:latin typeface="Times New Roman" panose="02020603050405020304" pitchFamily="18" charset="0"/>
-                <a:cs typeface="Times New Roman" panose="02020603050405020304" pitchFamily="18" charset="0"/>
-              </a:rPr>
-              <a:t>.</a:t>
-            </a:r>
-            <a:r>
-              <a:rPr lang="en-US" sz="1600" b="1" dirty="0" err="1">
-                <a:solidFill>
-                  <a:srgbClr val="FF0000"/>
-                </a:solidFill>
-                <a:latin typeface="Times New Roman" panose="02020603050405020304" pitchFamily="18" charset="0"/>
-                <a:cs typeface="Times New Roman" panose="02020603050405020304" pitchFamily="18" charset="0"/>
-              </a:rPr>
-              <a:t>hello</a:t>
-            </a:r>
-            <a:r>
-              <a:rPr lang="en-US" sz="1600" dirty="0">
-                <a:latin typeface="Times New Roman" panose="02020603050405020304" pitchFamily="18" charset="0"/>
-                <a:cs typeface="Times New Roman" panose="02020603050405020304" pitchFamily="18" charset="0"/>
-              </a:rPr>
-              <a:t>()</a:t>
-            </a:r>
-            <a:endParaRPr lang="pt-BR" sz="1600" dirty="0">
-              <a:latin typeface="Times New Roman" panose="02020603050405020304" pitchFamily="18" charset="0"/>
-              <a:cs typeface="Times New Roman" panose="02020603050405020304" pitchFamily="18" charset="0"/>
-            </a:endParaRPr>
           </a:p>
         </p:txBody>
       </p:sp>
@@ -16798,7 +16636,13 @@
   <p:cSld>
     <p:spTree>
       <p:nvGrpSpPr>
-        <p:cNvPr id="1" name=""/>
+        <p:cNvPr id="1" name="">
+          <a:extLst>
+            <a:ext uri="{FF2B5EF4-FFF2-40B4-BE49-F238E27FC236}">
+              <a16:creationId xmlns:a16="http://schemas.microsoft.com/office/drawing/2014/main" id="{73471CDC-4AAD-4552-E666-F3A7EDD57A2B}"/>
+            </a:ext>
+          </a:extLst>
+        </p:cNvPr>
         <p:cNvGrpSpPr/>
         <p:nvPr/>
       </p:nvGrpSpPr>
@@ -16812,7 +16656,13 @@
       </p:grpSpPr>
       <p:sp>
         <p:nvSpPr>
-          <p:cNvPr id="6" name="Title 1"/>
+          <p:cNvPr id="6" name="Title 1">
+            <a:extLst>
+              <a:ext uri="{FF2B5EF4-FFF2-40B4-BE49-F238E27FC236}">
+                <a16:creationId xmlns:a16="http://schemas.microsoft.com/office/drawing/2014/main" id="{A1A81D30-C30A-D1DD-BF11-050C5259A792}"/>
+              </a:ext>
+            </a:extLst>
+          </p:cNvPr>
           <p:cNvSpPr>
             <a:spLocks noGrp="1"/>
           </p:cNvSpPr>
@@ -16820,48 +16670,39 @@
             <p:ph type="title"/>
           </p:nvPr>
         </p:nvSpPr>
-        <p:spPr/>
+        <p:spPr>
+          <a:xfrm>
+            <a:off x="288099" y="603389"/>
+            <a:ext cx="8719822" cy="549005"/>
+          </a:xfrm>
+        </p:spPr>
         <p:txBody>
           <a:bodyPr>
             <a:normAutofit/>
           </a:bodyPr>
           <a:lstStyle/>
           <a:p>
-            <a:r>
-              <a:rPr lang="en-US" b="1" dirty="0" err="1">
+            <a:pPr algn="ctr"/>
+            <a:r>
+              <a:rPr lang="en-US" b="1" dirty="0">
                 <a:solidFill>
                   <a:srgbClr val="0070C0"/>
                 </a:solidFill>
               </a:rPr>
-              <a:t>Leitura</a:t>
-            </a:r>
-            <a:r>
-              <a:rPr lang="en-US" b="1" dirty="0">
-                <a:solidFill>
-                  <a:srgbClr val="0070C0"/>
-                </a:solidFill>
-              </a:rPr>
-              <a:t> </a:t>
-            </a:r>
-            <a:r>
-              <a:rPr lang="en-US" b="1" dirty="0" err="1">
-                <a:solidFill>
-                  <a:srgbClr val="0070C0"/>
-                </a:solidFill>
-              </a:rPr>
-              <a:t>Específica</a:t>
-            </a:r>
-            <a:endParaRPr lang="en-US" b="1" dirty="0">
-              <a:solidFill>
-                <a:srgbClr val="0070C0"/>
-              </a:solidFill>
-            </a:endParaRPr>
+              <a:t>Python – CLASSES E OO POLIMORFISMO EXEMPLO</a:t>
+            </a:r>
           </a:p>
         </p:txBody>
       </p:sp>
       <p:sp>
         <p:nvSpPr>
-          <p:cNvPr id="8" name="Text Placeholder 2"/>
+          <p:cNvPr id="8" name="Text Placeholder 2">
+            <a:extLst>
+              <a:ext uri="{FF2B5EF4-FFF2-40B4-BE49-F238E27FC236}">
+                <a16:creationId xmlns:a16="http://schemas.microsoft.com/office/drawing/2014/main" id="{3C801538-2903-25F0-8EDF-549383096A36}"/>
+              </a:ext>
+            </a:extLst>
+          </p:cNvPr>
           <p:cNvSpPr>
             <a:spLocks noGrp="1"/>
           </p:cNvSpPr>
@@ -16871,8 +16712,8 @@
         </p:nvSpPr>
         <p:spPr>
           <a:xfrm>
-            <a:off x="142865" y="1200150"/>
-            <a:ext cx="8865056" cy="3867149"/>
+            <a:off x="142865" y="1152394"/>
+            <a:ext cx="8865056" cy="3948048"/>
           </a:xfrm>
         </p:spPr>
         <p:txBody>
@@ -16885,165 +16726,243 @@
               <a:buNone/>
             </a:pPr>
             <a:r>
-              <a:rPr lang="pt-BR" sz="2400" dirty="0">
-                <a:latin typeface="Times New Roman" panose="02020603050405020304" pitchFamily="18" charset="0"/>
-                <a:cs typeface="Times New Roman" panose="02020603050405020304" pitchFamily="18" charset="0"/>
-              </a:rPr>
-              <a:t>-- </a:t>
-            </a:r>
-            <a:r>
-              <a:rPr lang="pt-BR" sz="2400" b="1" dirty="0">
-                <a:latin typeface="Times New Roman" panose="02020603050405020304" pitchFamily="18" charset="0"/>
-                <a:cs typeface="Times New Roman" panose="02020603050405020304" pitchFamily="18" charset="0"/>
-              </a:rPr>
-              <a:t>Classe/Herança/Polimorfismo</a:t>
+              <a:rPr lang="en-US" sz="2400" b="1" dirty="0">
+                <a:highlight>
+                  <a:srgbClr val="00FFFF"/>
+                </a:highlight>
+                <a:latin typeface="Times New Roman" panose="02020603050405020304" pitchFamily="18" charset="0"/>
+                <a:cs typeface="Times New Roman" panose="02020603050405020304" pitchFamily="18" charset="0"/>
+              </a:rPr>
+              <a:t>class</a:t>
+            </a:r>
+            <a:r>
+              <a:rPr lang="en-US" sz="2400" dirty="0">
+                <a:highlight>
+                  <a:srgbClr val="00FFFF"/>
+                </a:highlight>
+                <a:latin typeface="Times New Roman" panose="02020603050405020304" pitchFamily="18" charset="0"/>
+                <a:cs typeface="Times New Roman" panose="02020603050405020304" pitchFamily="18" charset="0"/>
+              </a:rPr>
+              <a:t> </a:t>
+            </a:r>
+            <a:r>
+              <a:rPr lang="en-US" sz="2400" b="1" dirty="0" err="1">
+                <a:solidFill>
+                  <a:srgbClr val="FF0000"/>
+                </a:solidFill>
+                <a:highlight>
+                  <a:srgbClr val="00FFFF"/>
+                </a:highlight>
+                <a:latin typeface="Times New Roman" panose="02020603050405020304" pitchFamily="18" charset="0"/>
+                <a:cs typeface="Times New Roman" panose="02020603050405020304" pitchFamily="18" charset="0"/>
+              </a:rPr>
+              <a:t>Subsub</a:t>
+            </a:r>
+            <a:r>
+              <a:rPr lang="en-US" sz="2400" dirty="0">
+                <a:highlight>
+                  <a:srgbClr val="00FFFF"/>
+                </a:highlight>
+                <a:latin typeface="Times New Roman" panose="02020603050405020304" pitchFamily="18" charset="0"/>
+                <a:cs typeface="Times New Roman" panose="02020603050405020304" pitchFamily="18" charset="0"/>
+              </a:rPr>
+              <a:t> (</a:t>
+            </a:r>
+            <a:r>
+              <a:rPr lang="en-US" sz="2400" b="1" dirty="0">
+                <a:highlight>
+                  <a:srgbClr val="00FFFF"/>
+                </a:highlight>
+                <a:latin typeface="Times New Roman" panose="02020603050405020304" pitchFamily="18" charset="0"/>
+                <a:cs typeface="Times New Roman" panose="02020603050405020304" pitchFamily="18" charset="0"/>
+              </a:rPr>
+              <a:t>Sub</a:t>
+            </a:r>
+            <a:r>
+              <a:rPr lang="en-US" sz="2400" dirty="0">
+                <a:highlight>
+                  <a:srgbClr val="00FFFF"/>
+                </a:highlight>
+                <a:latin typeface="Times New Roman" panose="02020603050405020304" pitchFamily="18" charset="0"/>
+                <a:cs typeface="Times New Roman" panose="02020603050405020304" pitchFamily="18" charset="0"/>
+              </a:rPr>
+              <a:t>):</a:t>
+            </a:r>
+          </a:p>
+          <a:p>
+            <a:pPr marL="0" indent="0" algn="just">
+              <a:buNone/>
+            </a:pPr>
+            <a:r>
+              <a:rPr lang="en-US" sz="2400" dirty="0">
+                <a:highlight>
+                  <a:srgbClr val="00FFFF"/>
+                </a:highlight>
+                <a:latin typeface="Times New Roman" panose="02020603050405020304" pitchFamily="18" charset="0"/>
+                <a:cs typeface="Times New Roman" panose="02020603050405020304" pitchFamily="18" charset="0"/>
+              </a:rPr>
+              <a:t>   </a:t>
+            </a:r>
+            <a:r>
+              <a:rPr lang="en-US" sz="2400" b="1" dirty="0">
+                <a:highlight>
+                  <a:srgbClr val="00FFFF"/>
+                </a:highlight>
+                <a:latin typeface="Times New Roman" panose="02020603050405020304" pitchFamily="18" charset="0"/>
+                <a:cs typeface="Times New Roman" panose="02020603050405020304" pitchFamily="18" charset="0"/>
+              </a:rPr>
+              <a:t>def</a:t>
+            </a:r>
+            <a:r>
+              <a:rPr lang="en-US" sz="2400" dirty="0">
+                <a:highlight>
+                  <a:srgbClr val="00FFFF"/>
+                </a:highlight>
+                <a:latin typeface="Times New Roman" panose="02020603050405020304" pitchFamily="18" charset="0"/>
+                <a:cs typeface="Times New Roman" panose="02020603050405020304" pitchFamily="18" charset="0"/>
+              </a:rPr>
+              <a:t> hello(self):</a:t>
+            </a:r>
+          </a:p>
+          <a:p>
+            <a:pPr marL="0" indent="0" algn="just">
+              <a:buNone/>
+            </a:pPr>
+            <a:r>
+              <a:rPr lang="en-US" sz="2400" b="1" dirty="0">
+                <a:highlight>
+                  <a:srgbClr val="00FFFF"/>
+                </a:highlight>
+                <a:latin typeface="Times New Roman" panose="02020603050405020304" pitchFamily="18" charset="0"/>
+                <a:cs typeface="Times New Roman" panose="02020603050405020304" pitchFamily="18" charset="0"/>
+              </a:rPr>
+              <a:t>       print</a:t>
+            </a:r>
+            <a:r>
+              <a:rPr lang="en-US" sz="2400" dirty="0">
+                <a:highlight>
+                  <a:srgbClr val="00FFFF"/>
+                </a:highlight>
+                <a:latin typeface="Times New Roman" panose="02020603050405020304" pitchFamily="18" charset="0"/>
+                <a:cs typeface="Times New Roman" panose="02020603050405020304" pitchFamily="18" charset="0"/>
+              </a:rPr>
+              <a:t>("Olá, sou a </a:t>
+            </a:r>
+            <a:r>
+              <a:rPr lang="en-US" sz="2400" dirty="0" err="1">
+                <a:highlight>
+                  <a:srgbClr val="00FFFF"/>
+                </a:highlight>
+                <a:latin typeface="Times New Roman" panose="02020603050405020304" pitchFamily="18" charset="0"/>
+                <a:cs typeface="Times New Roman" panose="02020603050405020304" pitchFamily="18" charset="0"/>
+              </a:rPr>
+              <a:t>subsubclasse</a:t>
+            </a:r>
+            <a:r>
+              <a:rPr lang="en-US" sz="2400" dirty="0">
+                <a:highlight>
+                  <a:srgbClr val="00FFFF"/>
+                </a:highlight>
+                <a:latin typeface="Times New Roman" panose="02020603050405020304" pitchFamily="18" charset="0"/>
+                <a:cs typeface="Times New Roman" panose="02020603050405020304" pitchFamily="18" charset="0"/>
+              </a:rPr>
+              <a:t>!")</a:t>
+            </a:r>
+          </a:p>
+          <a:p>
+            <a:pPr marL="0" indent="0" algn="just">
+              <a:buNone/>
+            </a:pPr>
+            <a:endParaRPr lang="en-US" sz="2400" dirty="0">
+              <a:highlight>
+                <a:srgbClr val="00FFFF"/>
+              </a:highlight>
+              <a:latin typeface="Times New Roman" panose="02020603050405020304" pitchFamily="18" charset="0"/>
+              <a:cs typeface="Times New Roman" panose="02020603050405020304" pitchFamily="18" charset="0"/>
+            </a:endParaRPr>
+          </a:p>
+          <a:p>
+            <a:pPr marL="0" indent="0" algn="just">
+              <a:buNone/>
+            </a:pPr>
+            <a:r>
+              <a:rPr lang="en-US" sz="2400" b="1" dirty="0">
+                <a:latin typeface="Times New Roman" panose="02020603050405020304" pitchFamily="18" charset="0"/>
+                <a:cs typeface="Times New Roman" panose="02020603050405020304" pitchFamily="18" charset="0"/>
+              </a:rPr>
+              <a:t>teste</a:t>
+            </a:r>
+            <a:r>
+              <a:rPr lang="en-US" sz="2400" dirty="0">
+                <a:latin typeface="Times New Roman" panose="02020603050405020304" pitchFamily="18" charset="0"/>
+                <a:cs typeface="Times New Roman" panose="02020603050405020304" pitchFamily="18" charset="0"/>
+              </a:rPr>
+              <a:t> = </a:t>
+            </a:r>
+            <a:r>
+              <a:rPr lang="en-US" sz="2400" b="1" dirty="0" err="1">
+                <a:highlight>
+                  <a:srgbClr val="00FFFF"/>
+                </a:highlight>
+                <a:latin typeface="Times New Roman" panose="02020603050405020304" pitchFamily="18" charset="0"/>
+                <a:cs typeface="Times New Roman" panose="02020603050405020304" pitchFamily="18" charset="0"/>
+              </a:rPr>
+              <a:t>Subsub</a:t>
+            </a:r>
+            <a:r>
+              <a:rPr lang="en-US" sz="2400" dirty="0">
+                <a:latin typeface="Times New Roman" panose="02020603050405020304" pitchFamily="18" charset="0"/>
+                <a:cs typeface="Times New Roman" panose="02020603050405020304" pitchFamily="18" charset="0"/>
+              </a:rPr>
+              <a:t>()</a:t>
+            </a:r>
+          </a:p>
+          <a:p>
+            <a:pPr marL="0" indent="0" algn="just">
+              <a:buNone/>
+            </a:pPr>
+            <a:r>
+              <a:rPr lang="en-US" sz="2400" b="1" dirty="0" err="1">
+                <a:latin typeface="Times New Roman" panose="02020603050405020304" pitchFamily="18" charset="0"/>
+                <a:cs typeface="Times New Roman" panose="02020603050405020304" pitchFamily="18" charset="0"/>
+              </a:rPr>
+              <a:t>teste</a:t>
+            </a:r>
+            <a:r>
+              <a:rPr lang="en-US" sz="2400" dirty="0" err="1">
+                <a:latin typeface="Times New Roman" panose="02020603050405020304" pitchFamily="18" charset="0"/>
+                <a:cs typeface="Times New Roman" panose="02020603050405020304" pitchFamily="18" charset="0"/>
+              </a:rPr>
+              <a:t>.</a:t>
+            </a:r>
+            <a:r>
+              <a:rPr lang="en-US" sz="2400" b="1" dirty="0" err="1">
+                <a:solidFill>
+                  <a:srgbClr val="FF0000"/>
+                </a:solidFill>
+                <a:latin typeface="Times New Roman" panose="02020603050405020304" pitchFamily="18" charset="0"/>
+                <a:cs typeface="Times New Roman" panose="02020603050405020304" pitchFamily="18" charset="0"/>
+              </a:rPr>
+              <a:t>hello</a:t>
+            </a:r>
+            <a:r>
+              <a:rPr lang="en-US" sz="2400" dirty="0">
+                <a:latin typeface="Times New Roman" panose="02020603050405020304" pitchFamily="18" charset="0"/>
+                <a:cs typeface="Times New Roman" panose="02020603050405020304" pitchFamily="18" charset="0"/>
+              </a:rPr>
+              <a:t>()</a:t>
             </a:r>
             <a:endParaRPr lang="pt-BR" sz="2400" dirty="0">
               <a:latin typeface="Times New Roman" panose="02020603050405020304" pitchFamily="18" charset="0"/>
               <a:cs typeface="Times New Roman" panose="02020603050405020304" pitchFamily="18" charset="0"/>
             </a:endParaRPr>
           </a:p>
-          <a:p>
-            <a:pPr marL="0" indent="0" algn="just">
-              <a:buNone/>
-            </a:pPr>
-            <a:r>
-              <a:rPr lang="pt-BR" sz="2400" dirty="0">
-                <a:latin typeface="Times New Roman" panose="02020603050405020304" pitchFamily="18" charset="0"/>
-                <a:cs typeface="Times New Roman" panose="02020603050405020304" pitchFamily="18" charset="0"/>
-              </a:rPr>
-              <a:t>[1] URL:</a:t>
-            </a:r>
-          </a:p>
-          <a:p>
-            <a:pPr marL="0" indent="0" algn="just">
-              <a:buNone/>
-            </a:pPr>
-            <a:r>
-              <a:rPr lang="pt-BR" sz="2400" dirty="0">
-                <a:latin typeface="Times New Roman" panose="02020603050405020304" pitchFamily="18" charset="0"/>
-                <a:cs typeface="Times New Roman" panose="02020603050405020304" pitchFamily="18" charset="0"/>
-              </a:rPr>
-              <a:t> </a:t>
-            </a:r>
-            <a:r>
-              <a:rPr lang="pt-BR" sz="2400" dirty="0">
-                <a:latin typeface="Times New Roman" panose="02020603050405020304" pitchFamily="18" charset="0"/>
-                <a:cs typeface="Times New Roman" panose="02020603050405020304" pitchFamily="18" charset="0"/>
-                <a:hlinkClick r:id="rId3"/>
-              </a:rPr>
-              <a:t>https://www.w3schools.com/python/python_classes.asp</a:t>
-            </a:r>
-            <a:r>
-              <a:rPr lang="pt-BR" sz="2400" dirty="0">
-                <a:latin typeface="Times New Roman" panose="02020603050405020304" pitchFamily="18" charset="0"/>
-                <a:cs typeface="Times New Roman" panose="02020603050405020304" pitchFamily="18" charset="0"/>
-              </a:rPr>
-              <a:t> </a:t>
-            </a:r>
-          </a:p>
-          <a:p>
-            <a:pPr marL="0" indent="0" algn="just">
-              <a:buNone/>
-            </a:pPr>
-            <a:r>
-              <a:rPr lang="pt-BR" sz="2400" dirty="0">
-                <a:latin typeface="Times New Roman" panose="02020603050405020304" pitchFamily="18" charset="0"/>
-                <a:cs typeface="Times New Roman" panose="02020603050405020304" pitchFamily="18" charset="0"/>
-              </a:rPr>
-              <a:t>-- </a:t>
-            </a:r>
-            <a:r>
-              <a:rPr lang="pt-BR" sz="2400" b="1" dirty="0">
-                <a:latin typeface="Times New Roman" panose="02020603050405020304" pitchFamily="18" charset="0"/>
-                <a:cs typeface="Times New Roman" panose="02020603050405020304" pitchFamily="18" charset="0"/>
-              </a:rPr>
-              <a:t>OO</a:t>
-            </a:r>
-            <a:endParaRPr lang="pt-BR" sz="2400" dirty="0">
-              <a:latin typeface="Times New Roman" panose="02020603050405020304" pitchFamily="18" charset="0"/>
-              <a:cs typeface="Times New Roman" panose="02020603050405020304" pitchFamily="18" charset="0"/>
-            </a:endParaRPr>
-          </a:p>
-          <a:p>
-            <a:pPr marL="0" indent="0" algn="just">
-              <a:buNone/>
-            </a:pPr>
-            <a:r>
-              <a:rPr lang="pt-BR" sz="2400" dirty="0">
-                <a:latin typeface="Times New Roman" panose="02020603050405020304" pitchFamily="18" charset="0"/>
-                <a:cs typeface="Times New Roman" panose="02020603050405020304" pitchFamily="18" charset="0"/>
-              </a:rPr>
-              <a:t>[2] URL : </a:t>
-            </a:r>
-            <a:r>
-              <a:rPr lang="pt-BR" sz="2400" dirty="0">
-                <a:latin typeface="Times New Roman" panose="02020603050405020304" pitchFamily="18" charset="0"/>
-                <a:cs typeface="Times New Roman" panose="02020603050405020304" pitchFamily="18" charset="0"/>
-                <a:hlinkClick r:id="rId4"/>
-              </a:rPr>
-              <a:t>https://docs.python.org/pt-br/3/tutorial/</a:t>
-            </a:r>
-            <a:endParaRPr lang="pt-BR" sz="2400" dirty="0">
-              <a:latin typeface="Times New Roman" panose="02020603050405020304" pitchFamily="18" charset="0"/>
-              <a:cs typeface="Times New Roman" panose="02020603050405020304" pitchFamily="18" charset="0"/>
-            </a:endParaRPr>
-          </a:p>
-          <a:p>
-            <a:pPr marL="0" indent="0" algn="just">
-              <a:buNone/>
-            </a:pPr>
-            <a:r>
-              <a:rPr lang="pt-BR" sz="2400" dirty="0">
-                <a:latin typeface="Times New Roman" panose="02020603050405020304" pitchFamily="18" charset="0"/>
-                <a:cs typeface="Times New Roman" panose="02020603050405020304" pitchFamily="18" charset="0"/>
-              </a:rPr>
-              <a:t>- </a:t>
-            </a:r>
-            <a:r>
-              <a:rPr lang="pt-BR" sz="2400" b="1" dirty="0">
-                <a:latin typeface="Times New Roman" panose="02020603050405020304" pitchFamily="18" charset="0"/>
-                <a:cs typeface="Times New Roman" panose="02020603050405020304" pitchFamily="18" charset="0"/>
-              </a:rPr>
-              <a:t>Polimorfismo</a:t>
-            </a:r>
-          </a:p>
-          <a:p>
-            <a:pPr marL="0" indent="0" algn="just">
-              <a:buNone/>
-            </a:pPr>
-            <a:r>
-              <a:rPr lang="pt-BR" sz="2400" dirty="0">
-                <a:latin typeface="Times New Roman" panose="02020603050405020304" pitchFamily="18" charset="0"/>
-                <a:cs typeface="Times New Roman" panose="02020603050405020304" pitchFamily="18" charset="0"/>
-              </a:rPr>
-              <a:t>[3] URL: </a:t>
-            </a:r>
-            <a:r>
-              <a:rPr lang="pt-BR" sz="2400" dirty="0">
-                <a:latin typeface="Times New Roman" panose="02020603050405020304" pitchFamily="18" charset="0"/>
-                <a:cs typeface="Times New Roman" panose="02020603050405020304" pitchFamily="18" charset="0"/>
-                <a:hlinkClick r:id="rId5"/>
-              </a:rPr>
-              <a:t>https://materialpublic.imd.ufrn.br/curso/disciplina/2/8</a:t>
-            </a:r>
-            <a:r>
-              <a:rPr lang="pt-BR" sz="2400" dirty="0">
-                <a:latin typeface="Times New Roman" panose="02020603050405020304" pitchFamily="18" charset="0"/>
-                <a:cs typeface="Times New Roman" panose="02020603050405020304" pitchFamily="18" charset="0"/>
-              </a:rPr>
-              <a:t>  </a:t>
-            </a:r>
-            <a:endParaRPr lang="pt-BR" sz="2400" dirty="0">
-              <a:latin typeface="Calibri" panose="020F0502020204030204" pitchFamily="34" charset="0"/>
-            </a:endParaRPr>
-          </a:p>
         </p:txBody>
       </p:sp>
     </p:spTree>
     <p:extLst>
       <p:ext uri="{BB962C8B-B14F-4D97-AF65-F5344CB8AC3E}">
-        <p14:creationId xmlns:p14="http://schemas.microsoft.com/office/powerpoint/2010/main" val="2747596967"/>
+        <p14:creationId xmlns:p14="http://schemas.microsoft.com/office/powerpoint/2010/main" val="2721320669"/>
       </p:ext>
     </p:extLst>
   </p:cSld>
@@ -17094,7 +17013,7 @@
                   <a:srgbClr val="0070C0"/>
                 </a:solidFill>
               </a:rPr>
-              <a:t>Aprenda</a:t>
+              <a:t>Leitura</a:t>
             </a:r>
             <a:r>
               <a:rPr lang="en-US" b="1" dirty="0">
@@ -17102,8 +17021,21 @@
                   <a:srgbClr val="0070C0"/>
                 </a:solidFill>
               </a:rPr>
-              <a:t>+</a:t>
-            </a:r>
+              <a:t> </a:t>
+            </a:r>
+            <a:r>
+              <a:rPr lang="en-US" b="1" dirty="0" err="1">
+                <a:solidFill>
+                  <a:srgbClr val="0070C0"/>
+                </a:solidFill>
+              </a:rPr>
+              <a:t>Específica</a:t>
+            </a:r>
+            <a:endParaRPr lang="en-US" b="1" dirty="0">
+              <a:solidFill>
+                <a:srgbClr val="0070C0"/>
+              </a:solidFill>
+            </a:endParaRPr>
           </a:p>
         </p:txBody>
       </p:sp>
@@ -17119,8 +17051,8 @@
         </p:nvSpPr>
         <p:spPr>
           <a:xfrm>
-            <a:off x="142865" y="1200151"/>
-            <a:ext cx="8865056" cy="3394472"/>
+            <a:off x="142865" y="1200150"/>
+            <a:ext cx="8865056" cy="3867149"/>
           </a:xfrm>
         </p:spPr>
         <p:txBody>
@@ -17132,7 +17064,21 @@
             <a:pPr marL="0" indent="0" algn="just">
               <a:buNone/>
             </a:pPr>
-            <a:endParaRPr lang="pt-BR" sz="2000" dirty="0">
+            <a:r>
+              <a:rPr lang="pt-BR" sz="2400" dirty="0">
+                <a:latin typeface="Times New Roman" panose="02020603050405020304" pitchFamily="18" charset="0"/>
+                <a:cs typeface="Times New Roman" panose="02020603050405020304" pitchFamily="18" charset="0"/>
+              </a:rPr>
+              <a:t>-- </a:t>
+            </a:r>
+            <a:r>
+              <a:rPr lang="pt-BR" sz="2400" b="1" dirty="0">
+                <a:latin typeface="Times New Roman" panose="02020603050405020304" pitchFamily="18" charset="0"/>
+                <a:cs typeface="Times New Roman" panose="02020603050405020304" pitchFamily="18" charset="0"/>
+              </a:rPr>
+              <a:t>Classe/Herança/Polimorfismo</a:t>
+            </a:r>
+            <a:endParaRPr lang="pt-BR" sz="2400" dirty="0">
               <a:latin typeface="Times New Roman" panose="02020603050405020304" pitchFamily="18" charset="0"/>
               <a:cs typeface="Times New Roman" panose="02020603050405020304" pitchFamily="18" charset="0"/>
             </a:endParaRPr>
@@ -17142,7 +17088,7 @@
               <a:buNone/>
             </a:pPr>
             <a:r>
-              <a:rPr lang="pt-BR" sz="2000" dirty="0">
+              <a:rPr lang="pt-BR" sz="2400" dirty="0">
                 <a:latin typeface="Times New Roman" panose="02020603050405020304" pitchFamily="18" charset="0"/>
                 <a:cs typeface="Times New Roman" panose="02020603050405020304" pitchFamily="18" charset="0"/>
               </a:rPr>
@@ -17154,21 +17100,47 @@
               <a:buNone/>
             </a:pPr>
             <a:r>
-              <a:rPr lang="pt-BR" sz="2000" dirty="0">
+              <a:rPr lang="pt-BR" sz="2400" dirty="0">
                 <a:latin typeface="Times New Roman" panose="02020603050405020304" pitchFamily="18" charset="0"/>
                 <a:cs typeface="Times New Roman" panose="02020603050405020304" pitchFamily="18" charset="0"/>
               </a:rPr>
               <a:t> </a:t>
             </a:r>
             <a:r>
-              <a:rPr lang="pt-BR" sz="2000" dirty="0">
+              <a:rPr lang="pt-BR" sz="2400" dirty="0">
                 <a:latin typeface="Times New Roman" panose="02020603050405020304" pitchFamily="18" charset="0"/>
                 <a:cs typeface="Times New Roman" panose="02020603050405020304" pitchFamily="18" charset="0"/>
                 <a:hlinkClick r:id="rId3"/>
               </a:rPr>
-              <a:t>https://www.youtube.com/watch?v=Xo1oCx6hqG4/</a:t>
-            </a:r>
-            <a:endParaRPr lang="pt-BR" sz="2000" dirty="0">
+              <a:t>https://www.w3schools.com/python/python_classes.asp</a:t>
+            </a:r>
+            <a:r>
+              <a:rPr lang="pt-BR" sz="2400" dirty="0">
+                <a:latin typeface="Times New Roman" panose="02020603050405020304" pitchFamily="18" charset="0"/>
+                <a:cs typeface="Times New Roman" panose="02020603050405020304" pitchFamily="18" charset="0"/>
+              </a:rPr>
+              <a:t> </a:t>
+            </a:r>
+          </a:p>
+          <a:p>
+            <a:pPr marL="0" indent="0" algn="just">
+              <a:buNone/>
+            </a:pPr>
+            <a:r>
+              <a:rPr lang="pt-BR" sz="2400" dirty="0">
+                <a:latin typeface="Times New Roman" panose="02020603050405020304" pitchFamily="18" charset="0"/>
+                <a:cs typeface="Times New Roman" panose="02020603050405020304" pitchFamily="18" charset="0"/>
+              </a:rPr>
+              <a:t>-- </a:t>
+            </a:r>
+            <a:r>
+              <a:rPr lang="pt-BR" sz="2400" b="1" dirty="0">
+                <a:latin typeface="Times New Roman" panose="02020603050405020304" pitchFamily="18" charset="0"/>
+                <a:cs typeface="Times New Roman" panose="02020603050405020304" pitchFamily="18" charset="0"/>
+              </a:rPr>
+              <a:t>OO</a:t>
+            </a:r>
+            <a:endParaRPr lang="pt-BR" sz="2400" dirty="0">
               <a:latin typeface="Times New Roman" panose="02020603050405020304" pitchFamily="18" charset="0"/>
               <a:cs typeface="Times New Roman" panose="02020603050405020304" pitchFamily="18" charset="0"/>
             </a:endParaRPr>
@@ -17177,7 +17149,22 @@
             <a:pPr marL="0" indent="0" algn="just">
               <a:buNone/>
             </a:pPr>
-            <a:endParaRPr lang="pt-BR" sz="2000" dirty="0">
+            <a:r>
+              <a:rPr lang="pt-BR" sz="2400" dirty="0">
+                <a:latin typeface="Times New Roman" panose="02020603050405020304" pitchFamily="18" charset="0"/>
+                <a:cs typeface="Times New Roman" panose="02020603050405020304" pitchFamily="18" charset="0"/>
+              </a:rPr>
+              <a:t>[2] URL : </a:t>
+            </a:r>
+            <a:r>
+              <a:rPr lang="pt-BR" sz="2400" dirty="0">
+                <a:latin typeface="Times New Roman" panose="02020603050405020304" pitchFamily="18" charset="0"/>
+                <a:cs typeface="Times New Roman" panose="02020603050405020304" pitchFamily="18" charset="0"/>
+                <a:hlinkClick r:id="rId4"/>
+              </a:rPr>
+              <a:t>https://docs.python.org/pt-br/3/tutorial/</a:t>
+            </a:r>
+            <a:endParaRPr lang="pt-BR" sz="2400" dirty="0">
               <a:latin typeface="Times New Roman" panose="02020603050405020304" pitchFamily="18" charset="0"/>
               <a:cs typeface="Times New Roman" panose="02020603050405020304" pitchFamily="18" charset="0"/>
             </a:endParaRPr>
@@ -17187,11 +17174,18 @@
               <a:buNone/>
             </a:pPr>
             <a:r>
-              <a:rPr lang="pt-BR" sz="2000" dirty="0">
-                <a:latin typeface="Times New Roman" panose="02020603050405020304" pitchFamily="18" charset="0"/>
-                <a:cs typeface="Times New Roman" panose="02020603050405020304" pitchFamily="18" charset="0"/>
-              </a:rPr>
-              <a:t>[2] URL:</a:t>
+              <a:rPr lang="pt-BR" sz="2400" dirty="0">
+                <a:latin typeface="Times New Roman" panose="02020603050405020304" pitchFamily="18" charset="0"/>
+                <a:cs typeface="Times New Roman" panose="02020603050405020304" pitchFamily="18" charset="0"/>
+              </a:rPr>
+              <a:t>- </a:t>
+            </a:r>
+            <a:r>
+              <a:rPr lang="pt-BR" sz="2400" b="1" dirty="0">
+                <a:latin typeface="Times New Roman" panose="02020603050405020304" pitchFamily="18" charset="0"/>
+                <a:cs typeface="Times New Roman" panose="02020603050405020304" pitchFamily="18" charset="0"/>
+              </a:rPr>
+              <a:t>Polimorfismo</a:t>
             </a:r>
           </a:p>
           <a:p>
@@ -17199,54 +17193,28 @@
               <a:buNone/>
             </a:pPr>
             <a:r>
-              <a:rPr lang="pt-BR" sz="2000" dirty="0">
-                <a:latin typeface="Times New Roman" panose="02020603050405020304" pitchFamily="18" charset="0"/>
-                <a:cs typeface="Times New Roman" panose="02020603050405020304" pitchFamily="18" charset="0"/>
-              </a:rPr>
-              <a:t> </a:t>
-            </a:r>
-            <a:r>
-              <a:rPr lang="pt-BR" sz="2000" dirty="0">
-                <a:solidFill>
-                  <a:schemeClr val="tx1"/>
-                </a:solidFill>
-                <a:latin typeface="Times New Roman" panose="02020603050405020304" pitchFamily="18" charset="0"/>
-                <a:cs typeface="Times New Roman" panose="02020603050405020304" pitchFamily="18" charset="0"/>
-                <a:hlinkClick r:id="rId4"/>
-              </a:rPr>
-              <a:t>https://algoritmosempython.com.br/cursos/programacao-python/encapsulamento/</a:t>
-            </a:r>
-            <a:endParaRPr lang="pt-BR" sz="2000" dirty="0">
-              <a:solidFill>
-                <a:schemeClr val="tx1"/>
-              </a:solidFill>
-              <a:latin typeface="Times New Roman" panose="02020603050405020304" pitchFamily="18" charset="0"/>
-              <a:cs typeface="Times New Roman" panose="02020603050405020304" pitchFamily="18" charset="0"/>
-            </a:endParaRPr>
-          </a:p>
-          <a:p>
-            <a:pPr marL="0" indent="0" algn="just">
-              <a:buNone/>
-            </a:pPr>
-            <a:endParaRPr lang="pt-BR" sz="2000" dirty="0">
-              <a:latin typeface="Times New Roman" panose="02020603050405020304" pitchFamily="18" charset="0"/>
-              <a:cs typeface="Times New Roman" panose="02020603050405020304" pitchFamily="18" charset="0"/>
-            </a:endParaRPr>
-          </a:p>
-          <a:p>
-            <a:pPr marL="0" indent="0" algn="just">
-              <a:buNone/>
-            </a:pPr>
-            <a:endParaRPr lang="pt-BR" sz="2000" dirty="0">
-              <a:latin typeface="Times New Roman" panose="02020603050405020304" pitchFamily="18" charset="0"/>
-              <a:cs typeface="Times New Roman" panose="02020603050405020304" pitchFamily="18" charset="0"/>
-            </a:endParaRPr>
-          </a:p>
-          <a:p>
-            <a:pPr marL="0" indent="0" algn="just">
-              <a:buNone/>
-            </a:pPr>
-            <a:endParaRPr lang="pt-BR" sz="2000" dirty="0">
+              <a:rPr lang="pt-BR" sz="2400" dirty="0">
+                <a:latin typeface="Times New Roman" panose="02020603050405020304" pitchFamily="18" charset="0"/>
+                <a:cs typeface="Times New Roman" panose="02020603050405020304" pitchFamily="18" charset="0"/>
+              </a:rPr>
+              <a:t>[3] URL: </a:t>
+            </a:r>
+            <a:r>
+              <a:rPr lang="pt-BR" sz="2400" dirty="0">
+                <a:latin typeface="Times New Roman" panose="02020603050405020304" pitchFamily="18" charset="0"/>
+                <a:cs typeface="Times New Roman" panose="02020603050405020304" pitchFamily="18" charset="0"/>
+                <a:hlinkClick r:id="rId5"/>
+              </a:rPr>
+              <a:t>https://materialpublic.imd.ufrn.br/curso/disciplina/2/8</a:t>
+            </a:r>
+            <a:r>
+              <a:rPr lang="pt-BR" sz="2400" dirty="0">
+                <a:latin typeface="Times New Roman" panose="02020603050405020304" pitchFamily="18" charset="0"/>
+                <a:cs typeface="Times New Roman" panose="02020603050405020304" pitchFamily="18" charset="0"/>
+              </a:rPr>
+              <a:t>  </a:t>
+            </a:r>
+            <a:endParaRPr lang="pt-BR" sz="2400" dirty="0">
               <a:latin typeface="Calibri" panose="020F0502020204030204" pitchFamily="34" charset="0"/>
             </a:endParaRPr>
           </a:p>
@@ -17255,7 +17223,7 @@
     </p:spTree>
     <p:extLst>
       <p:ext uri="{BB962C8B-B14F-4D97-AF65-F5344CB8AC3E}">
-        <p14:creationId xmlns:p14="http://schemas.microsoft.com/office/powerpoint/2010/main" val="3680270425"/>
+        <p14:creationId xmlns:p14="http://schemas.microsoft.com/office/powerpoint/2010/main" val="2747596967"/>
       </p:ext>
     </p:extLst>
   </p:cSld>
@@ -17306,7 +17274,7 @@
                   <a:srgbClr val="0070C0"/>
                 </a:solidFill>
               </a:rPr>
-              <a:t>Dinâmica</a:t>
+              <a:t>Aprenda</a:t>
             </a:r>
             <a:r>
               <a:rPr lang="en-US" b="1" dirty="0">
@@ -17314,21 +17282,8 @@
                   <a:srgbClr val="0070C0"/>
                 </a:solidFill>
               </a:rPr>
-              <a:t>/</a:t>
-            </a:r>
-            <a:r>
-              <a:rPr lang="en-US" b="1" dirty="0" err="1">
-                <a:solidFill>
-                  <a:srgbClr val="0070C0"/>
-                </a:solidFill>
-              </a:rPr>
-              <a:t>Atividades</a:t>
-            </a:r>
-            <a:endParaRPr lang="en-US" b="1" dirty="0">
-              <a:solidFill>
-                <a:srgbClr val="0070C0"/>
-              </a:solidFill>
-            </a:endParaRPr>
+              <a:t>+</a:t>
+            </a:r>
           </a:p>
         </p:txBody>
       </p:sp>
@@ -17344,8 +17299,8 @@
         </p:nvSpPr>
         <p:spPr>
           <a:xfrm>
-            <a:off x="139472" y="1063230"/>
-            <a:ext cx="8865056" cy="3606305"/>
+            <a:off x="142865" y="1200151"/>
+            <a:ext cx="8865056" cy="3394472"/>
           </a:xfrm>
         </p:spPr>
         <p:txBody>
@@ -17354,36 +17309,133 @@
           </a:bodyPr>
           <a:lstStyle/>
           <a:p>
-            <a:pPr algn="just">
-              <a:buFontTx/>
-              <a:buChar char="-"/>
-            </a:pPr>
-            <a:r>
-              <a:rPr lang="pt-BR" dirty="0">
-                <a:latin typeface="Times New Roman" panose="02020603050405020304" pitchFamily="18" charset="0"/>
-                <a:cs typeface="Times New Roman" panose="02020603050405020304" pitchFamily="18" charset="0"/>
-              </a:rPr>
-              <a:t>Exercícios de Fixação</a:t>
-            </a:r>
-          </a:p>
-          <a:p>
             <a:pPr marL="0" indent="0" algn="just">
               <a:buNone/>
             </a:pPr>
-            <a:r>
-              <a:rPr lang="pt-BR" dirty="0">
-                <a:latin typeface="Times New Roman" panose="02020603050405020304" pitchFamily="18" charset="0"/>
-                <a:cs typeface="Times New Roman" panose="02020603050405020304" pitchFamily="18" charset="0"/>
-              </a:rPr>
-              <a:t>	Desafios em Sala de Aula.</a:t>
-            </a:r>
+            <a:endParaRPr lang="pt-BR" sz="2000" dirty="0">
+              <a:latin typeface="Times New Roman" panose="02020603050405020304" pitchFamily="18" charset="0"/>
+              <a:cs typeface="Times New Roman" panose="02020603050405020304" pitchFamily="18" charset="0"/>
+            </a:endParaRPr>
+          </a:p>
+          <a:p>
+            <a:pPr marL="0" indent="0" algn="just">
+              <a:buNone/>
+            </a:pPr>
+            <a:r>
+              <a:rPr lang="pt-BR" sz="2000" dirty="0">
+                <a:latin typeface="Times New Roman" panose="02020603050405020304" pitchFamily="18" charset="0"/>
+                <a:cs typeface="Times New Roman" panose="02020603050405020304" pitchFamily="18" charset="0"/>
+              </a:rPr>
+              <a:t>[1] URL:</a:t>
+            </a:r>
+          </a:p>
+          <a:p>
+            <a:pPr marL="0" indent="0" algn="just">
+              <a:buNone/>
+            </a:pPr>
+            <a:r>
+              <a:rPr lang="pt-BR" sz="2000" dirty="0">
+                <a:latin typeface="Times New Roman" panose="02020603050405020304" pitchFamily="18" charset="0"/>
+                <a:cs typeface="Times New Roman" panose="02020603050405020304" pitchFamily="18" charset="0"/>
+              </a:rPr>
+              <a:t> </a:t>
+            </a:r>
+            <a:r>
+              <a:rPr lang="pt-BR" sz="2000" dirty="0">
+                <a:latin typeface="Times New Roman" panose="02020603050405020304" pitchFamily="18" charset="0"/>
+                <a:cs typeface="Times New Roman" panose="02020603050405020304" pitchFamily="18" charset="0"/>
+                <a:hlinkClick r:id="rId3"/>
+              </a:rPr>
+              <a:t>https://www.youtube.com/watch?v=Xo1oCx6hqG4/</a:t>
+            </a:r>
+            <a:endParaRPr lang="pt-BR" sz="2000" dirty="0">
+              <a:latin typeface="Times New Roman" panose="02020603050405020304" pitchFamily="18" charset="0"/>
+              <a:cs typeface="Times New Roman" panose="02020603050405020304" pitchFamily="18" charset="0"/>
+            </a:endParaRPr>
+          </a:p>
+          <a:p>
+            <a:pPr marL="0" indent="0" algn="just">
+              <a:buNone/>
+            </a:pPr>
+            <a:endParaRPr lang="pt-BR" sz="2000" dirty="0">
+              <a:latin typeface="Times New Roman" panose="02020603050405020304" pitchFamily="18" charset="0"/>
+              <a:cs typeface="Times New Roman" panose="02020603050405020304" pitchFamily="18" charset="0"/>
+            </a:endParaRPr>
+          </a:p>
+          <a:p>
+            <a:pPr marL="0" indent="0" algn="just">
+              <a:buNone/>
+            </a:pPr>
+            <a:r>
+              <a:rPr lang="pt-BR" sz="2000" dirty="0">
+                <a:latin typeface="Times New Roman" panose="02020603050405020304" pitchFamily="18" charset="0"/>
+                <a:cs typeface="Times New Roman" panose="02020603050405020304" pitchFamily="18" charset="0"/>
+              </a:rPr>
+              <a:t>[2] URL:</a:t>
+            </a:r>
+          </a:p>
+          <a:p>
+            <a:pPr marL="0" indent="0" algn="just">
+              <a:buNone/>
+            </a:pPr>
+            <a:r>
+              <a:rPr lang="pt-BR" sz="2000" dirty="0">
+                <a:latin typeface="Times New Roman" panose="02020603050405020304" pitchFamily="18" charset="0"/>
+                <a:cs typeface="Times New Roman" panose="02020603050405020304" pitchFamily="18" charset="0"/>
+              </a:rPr>
+              <a:t> </a:t>
+            </a:r>
+            <a:r>
+              <a:rPr lang="pt-BR" sz="2000" dirty="0">
+                <a:solidFill>
+                  <a:schemeClr val="tx1"/>
+                </a:solidFill>
+                <a:latin typeface="Times New Roman" panose="02020603050405020304" pitchFamily="18" charset="0"/>
+                <a:cs typeface="Times New Roman" panose="02020603050405020304" pitchFamily="18" charset="0"/>
+                <a:hlinkClick r:id="rId4"/>
+              </a:rPr>
+              <a:t>https://algoritmosempython.com.br/cursos/programacao-python/encapsulamento/</a:t>
+            </a:r>
+            <a:endParaRPr lang="pt-BR" sz="2000" dirty="0">
+              <a:solidFill>
+                <a:schemeClr val="tx1"/>
+              </a:solidFill>
+              <a:latin typeface="Times New Roman" panose="02020603050405020304" pitchFamily="18" charset="0"/>
+              <a:cs typeface="Times New Roman" panose="02020603050405020304" pitchFamily="18" charset="0"/>
+            </a:endParaRPr>
+          </a:p>
+          <a:p>
+            <a:pPr marL="0" indent="0" algn="just">
+              <a:buNone/>
+            </a:pPr>
+            <a:endParaRPr lang="pt-BR" sz="2000" dirty="0">
+              <a:latin typeface="Times New Roman" panose="02020603050405020304" pitchFamily="18" charset="0"/>
+              <a:cs typeface="Times New Roman" panose="02020603050405020304" pitchFamily="18" charset="0"/>
+            </a:endParaRPr>
+          </a:p>
+          <a:p>
+            <a:pPr marL="0" indent="0" algn="just">
+              <a:buNone/>
+            </a:pPr>
+            <a:endParaRPr lang="pt-BR" sz="2000" dirty="0">
+              <a:latin typeface="Times New Roman" panose="02020603050405020304" pitchFamily="18" charset="0"/>
+              <a:cs typeface="Times New Roman" panose="02020603050405020304" pitchFamily="18" charset="0"/>
+            </a:endParaRPr>
+          </a:p>
+          <a:p>
+            <a:pPr marL="0" indent="0" algn="just">
+              <a:buNone/>
+            </a:pPr>
+            <a:endParaRPr lang="pt-BR" sz="2000" dirty="0">
+              <a:latin typeface="Calibri" panose="020F0502020204030204" pitchFamily="34" charset="0"/>
+            </a:endParaRPr>
           </a:p>
         </p:txBody>
       </p:sp>
     </p:spTree>
     <p:extLst>
       <p:ext uri="{BB962C8B-B14F-4D97-AF65-F5344CB8AC3E}">
-        <p14:creationId xmlns:p14="http://schemas.microsoft.com/office/powerpoint/2010/main" val="2470652989"/>
+        <p14:creationId xmlns:p14="http://schemas.microsoft.com/office/powerpoint/2010/main" val="3680270425"/>
       </p:ext>
     </p:extLst>
   </p:cSld>
@@ -17434,6 +17486,134 @@
                   <a:srgbClr val="0070C0"/>
                 </a:solidFill>
               </a:rPr>
+              <a:t>Dinâmica</a:t>
+            </a:r>
+            <a:r>
+              <a:rPr lang="en-US" b="1" dirty="0">
+                <a:solidFill>
+                  <a:srgbClr val="0070C0"/>
+                </a:solidFill>
+              </a:rPr>
+              <a:t>/</a:t>
+            </a:r>
+            <a:r>
+              <a:rPr lang="en-US" b="1" dirty="0" err="1">
+                <a:solidFill>
+                  <a:srgbClr val="0070C0"/>
+                </a:solidFill>
+              </a:rPr>
+              <a:t>Atividades</a:t>
+            </a:r>
+            <a:endParaRPr lang="en-US" b="1" dirty="0">
+              <a:solidFill>
+                <a:srgbClr val="0070C0"/>
+              </a:solidFill>
+            </a:endParaRPr>
+          </a:p>
+        </p:txBody>
+      </p:sp>
+      <p:sp>
+        <p:nvSpPr>
+          <p:cNvPr id="8" name="Text Placeholder 2"/>
+          <p:cNvSpPr>
+            <a:spLocks noGrp="1"/>
+          </p:cNvSpPr>
+          <p:nvPr>
+            <p:ph type="body" sz="half" idx="1"/>
+          </p:nvPr>
+        </p:nvSpPr>
+        <p:spPr>
+          <a:xfrm>
+            <a:off x="139472" y="1063230"/>
+            <a:ext cx="8865056" cy="3606305"/>
+          </a:xfrm>
+        </p:spPr>
+        <p:txBody>
+          <a:bodyPr>
+            <a:noAutofit/>
+          </a:bodyPr>
+          <a:lstStyle/>
+          <a:p>
+            <a:pPr algn="just">
+              <a:buFontTx/>
+              <a:buChar char="-"/>
+            </a:pPr>
+            <a:r>
+              <a:rPr lang="pt-BR" sz="2400" dirty="0">
+                <a:latin typeface="Times New Roman" panose="02020603050405020304" pitchFamily="18" charset="0"/>
+                <a:cs typeface="Times New Roman" panose="02020603050405020304" pitchFamily="18" charset="0"/>
+              </a:rPr>
+              <a:t>Exercícios de Fixação</a:t>
+            </a:r>
+          </a:p>
+          <a:p>
+            <a:pPr marL="0" indent="0" algn="just">
+              <a:buNone/>
+            </a:pPr>
+            <a:r>
+              <a:rPr lang="pt-BR" sz="2400" dirty="0">
+                <a:latin typeface="Times New Roman" panose="02020603050405020304" pitchFamily="18" charset="0"/>
+                <a:cs typeface="Times New Roman" panose="02020603050405020304" pitchFamily="18" charset="0"/>
+              </a:rPr>
+              <a:t>	Desafios em Sala de Aula.</a:t>
+            </a:r>
+          </a:p>
+        </p:txBody>
+      </p:sp>
+    </p:spTree>
+    <p:extLst>
+      <p:ext uri="{BB962C8B-B14F-4D97-AF65-F5344CB8AC3E}">
+        <p14:creationId xmlns:p14="http://schemas.microsoft.com/office/powerpoint/2010/main" val="2470652989"/>
+      </p:ext>
+    </p:extLst>
+  </p:cSld>
+  <p:clrMapOvr>
+    <a:masterClrMapping/>
+  </p:clrMapOvr>
+  <p:transition spd="med"/>
+</p:sld>
+</file>
+
+<file path=ppt/slides/slide37.xml><?xml version="1.0" encoding="utf-8"?>
+<p:sld xmlns:a="http://schemas.openxmlformats.org/drawingml/2006/main" xmlns:r="http://schemas.openxmlformats.org/officeDocument/2006/relationships" xmlns:p="http://schemas.openxmlformats.org/presentationml/2006/main">
+  <p:cSld>
+    <p:spTree>
+      <p:nvGrpSpPr>
+        <p:cNvPr id="1" name=""/>
+        <p:cNvGrpSpPr/>
+        <p:nvPr/>
+      </p:nvGrpSpPr>
+      <p:grpSpPr>
+        <a:xfrm>
+          <a:off x="0" y="0"/>
+          <a:ext cx="0" cy="0"/>
+          <a:chOff x="0" y="0"/>
+          <a:chExt cx="0" cy="0"/>
+        </a:xfrm>
+      </p:grpSpPr>
+      <p:sp>
+        <p:nvSpPr>
+          <p:cNvPr id="6" name="Title 1"/>
+          <p:cNvSpPr>
+            <a:spLocks noGrp="1"/>
+          </p:cNvSpPr>
+          <p:nvPr>
+            <p:ph type="title"/>
+          </p:nvPr>
+        </p:nvSpPr>
+        <p:spPr/>
+        <p:txBody>
+          <a:bodyPr>
+            <a:normAutofit/>
+          </a:bodyPr>
+          <a:lstStyle/>
+          <a:p>
+            <a:r>
+              <a:rPr lang="en-US" b="1" dirty="0" err="1">
+                <a:solidFill>
+                  <a:srgbClr val="0070C0"/>
+                </a:solidFill>
+              </a:rPr>
               <a:t>Referências</a:t>
             </a:r>
             <a:r>
@@ -17562,7 +17742,7 @@
 </p:sld>
 </file>
 
-<file path=ppt/slides/slide37.xml><?xml version="1.0" encoding="utf-8"?>
+<file path=ppt/slides/slide38.xml><?xml version="1.0" encoding="utf-8"?>
 <p:sld xmlns:a="http://schemas.openxmlformats.org/drawingml/2006/main" xmlns:r="http://schemas.openxmlformats.org/officeDocument/2006/relationships" xmlns:p="http://schemas.openxmlformats.org/presentationml/2006/main">
   <p:cSld>
     <p:spTree>
